--- a/Locator_Generator_Overview.pptx
+++ b/Locator_Generator_Overview.pptx
@@ -2,18 +2,18 @@
 <file path=ppt/presentation.xml><?xml version="1.0" encoding="utf-8"?>
 <p:presentation xmlns:p="http://schemas.openxmlformats.org/presentationml/2006/main">
   <p:sldMasterIdLst>
-    <p:sldMasterId xmlns:r="http://schemas.openxmlformats.org/officeDocument/2006/relationships" id="2147483648" r:id="R68f8d783946a4b4b"/>
+    <p:sldMasterId xmlns:r="http://schemas.openxmlformats.org/officeDocument/2006/relationships" id="2147483648" r:id="Rb8f1f3ca84bd4282"/>
   </p:sldMasterIdLst>
   <p:notesMasterIdLst>
-    <p:notesMasterId xmlns:r="http://schemas.openxmlformats.org/officeDocument/2006/relationships" r:id="Ree8289940e94443a"/>
+    <p:notesMasterId xmlns:r="http://schemas.openxmlformats.org/officeDocument/2006/relationships" r:id="R4beabd06052948cd"/>
   </p:notesMasterIdLst>
   <p:sldIdLst>
-    <p:sldId xmlns:r="http://schemas.openxmlformats.org/officeDocument/2006/relationships" id="256" r:id="R17983acc8a3d4c6d"/>
-    <p:sldId xmlns:r="http://schemas.openxmlformats.org/officeDocument/2006/relationships" id="257" r:id="Rf4dfde999d8e476b"/>
-    <p:sldId xmlns:r="http://schemas.openxmlformats.org/officeDocument/2006/relationships" id="258" r:id="R11574dfddecf4c5b"/>
-    <p:sldId xmlns:r="http://schemas.openxmlformats.org/officeDocument/2006/relationships" id="259" r:id="Ra17f2b93ebca4010"/>
-    <p:sldId xmlns:r="http://schemas.openxmlformats.org/officeDocument/2006/relationships" id="260" r:id="Rf461d950ed8f4971"/>
-    <p:sldId xmlns:r="http://schemas.openxmlformats.org/officeDocument/2006/relationships" id="261" r:id="Rec70764a953d4c39"/>
+    <p:sldId xmlns:r="http://schemas.openxmlformats.org/officeDocument/2006/relationships" id="256" r:id="R6a69644d218945f8"/>
+    <p:sldId xmlns:r="http://schemas.openxmlformats.org/officeDocument/2006/relationships" id="257" r:id="R498f0037bf874e77"/>
+    <p:sldId xmlns:r="http://schemas.openxmlformats.org/officeDocument/2006/relationships" id="258" r:id="R5018d42a2e8448f6"/>
+    <p:sldId xmlns:r="http://schemas.openxmlformats.org/officeDocument/2006/relationships" id="259" r:id="R63ec1f11da1648e4"/>
+    <p:sldId xmlns:r="http://schemas.openxmlformats.org/officeDocument/2006/relationships" id="260" r:id="Rfdd4c59fac85471a"/>
+    <p:sldId xmlns:r="http://schemas.openxmlformats.org/officeDocument/2006/relationships" id="261" r:id="Rd9745ff2f39c4b09"/>
   </p:sldIdLst>
   <p:sldSz cx="12192000" cy="6858000"/>
   <p:notesSz cx="6858000" cy="9144000"/>
@@ -3216,12 +3216,12 @@
   </p:cSld>
   <p:clrMap bg1="lt1" tx1="dk1" bg2="lt2" tx2="dk2" accent1="accent1" accent2="accent2" accent3="accent3" accent4="accent4" accent5="accent5" accent6="accent6" hlink="hlink" folHlink="folHlink"/>
   <p:sldLayoutIdLst>
-    <p:sldLayoutId xmlns:r="http://schemas.openxmlformats.org/officeDocument/2006/relationships" id="2147483649" r:id="R5ec3c3f20a314225"/>
-    <p:sldLayoutId xmlns:r="http://schemas.openxmlformats.org/officeDocument/2006/relationships" id="2147483650" r:id="R41f2eae597c24551"/>
-    <p:sldLayoutId xmlns:r="http://schemas.openxmlformats.org/officeDocument/2006/relationships" id="2147483651" r:id="Re1bb7026e5de4d0b"/>
-    <p:sldLayoutId xmlns:r="http://schemas.openxmlformats.org/officeDocument/2006/relationships" id="2147483652" r:id="R7d6bd65ede9b431e"/>
-    <p:sldLayoutId xmlns:r="http://schemas.openxmlformats.org/officeDocument/2006/relationships" id="2147483653" r:id="R4872655472514b7a"/>
-    <p:sldLayoutId xmlns:r="http://schemas.openxmlformats.org/officeDocument/2006/relationships" id="2147483654" r:id="R7ee27e742b3843c2"/>
+    <p:sldLayoutId xmlns:r="http://schemas.openxmlformats.org/officeDocument/2006/relationships" id="2147483649" r:id="Rcb1b6128a4f749b2"/>
+    <p:sldLayoutId xmlns:r="http://schemas.openxmlformats.org/officeDocument/2006/relationships" id="2147483650" r:id="Rb3fda821ab4343b3"/>
+    <p:sldLayoutId xmlns:r="http://schemas.openxmlformats.org/officeDocument/2006/relationships" id="2147483651" r:id="Reaf59fcc344e4a2c"/>
+    <p:sldLayoutId xmlns:r="http://schemas.openxmlformats.org/officeDocument/2006/relationships" id="2147483652" r:id="R269262cab60f4e33"/>
+    <p:sldLayoutId xmlns:r="http://schemas.openxmlformats.org/officeDocument/2006/relationships" id="2147483653" r:id="R0c5b6b410e494b78"/>
+    <p:sldLayoutId xmlns:r="http://schemas.openxmlformats.org/officeDocument/2006/relationships" id="2147483654" r:id="R8f07084bfa714d37"/>
   </p:sldLayoutIdLst>
   <p:txStyles>
     <p:titleStyle>
@@ -3837,6 +3837,7 @@
               </a:defRPr>
             </a:defPPr>
             <a:lvl1pPr>
+              <a:buNone/>
               <a:defRPr sz="1050" b="1">
                 <a:solidFill>
                   <a:srgbClr val="93C5FD"/>
@@ -3844,6 +3845,7 @@
               </a:defRPr>
             </a:lvl1pPr>
             <a:lvl2pPr>
+              <a:buNone/>
               <a:defRPr sz="1050" b="1">
                 <a:solidFill>
                   <a:srgbClr val="93C5FD"/>
@@ -3851,6 +3853,7 @@
               </a:defRPr>
             </a:lvl2pPr>
             <a:lvl3pPr>
+              <a:buNone/>
               <a:defRPr sz="1050" b="1">
                 <a:solidFill>
                   <a:srgbClr val="93C5FD"/>
@@ -3858,6 +3861,7 @@
               </a:defRPr>
             </a:lvl3pPr>
             <a:lvl4pPr>
+              <a:buNone/>
               <a:defRPr sz="1050" b="1">
                 <a:solidFill>
                   <a:srgbClr val="93C5FD"/>
@@ -3865,6 +3869,7 @@
               </a:defRPr>
             </a:lvl4pPr>
             <a:lvl5pPr>
+              <a:buNone/>
               <a:defRPr sz="1050" b="1">
                 <a:solidFill>
                   <a:srgbClr val="93C5FD"/>
@@ -3872,6 +3877,7 @@
               </a:defRPr>
             </a:lvl5pPr>
             <a:lvl6pPr>
+              <a:buNone/>
               <a:defRPr sz="1050" b="1">
                 <a:solidFill>
                   <a:srgbClr val="93C5FD"/>
@@ -3879,6 +3885,7 @@
               </a:defRPr>
             </a:lvl6pPr>
             <a:lvl7pPr>
+              <a:buNone/>
               <a:defRPr sz="1050" b="1">
                 <a:solidFill>
                   <a:srgbClr val="93C5FD"/>
@@ -3886,6 +3893,7 @@
               </a:defRPr>
             </a:lvl7pPr>
             <a:lvl8pPr>
+              <a:buNone/>
               <a:defRPr sz="1050" b="1">
                 <a:solidFill>
                   <a:srgbClr val="93C5FD"/>
@@ -3893,6 +3901,7 @@
               </a:defRPr>
             </a:lvl8pPr>
             <a:lvl9pPr>
+              <a:buNone/>
               <a:defRPr sz="1050" b="1">
                 <a:solidFill>
                   <a:srgbClr val="93C5FD"/>
@@ -3902,6 +3911,7 @@
           </a:lstStyle>
           <a:p xmlns:a="http://schemas.openxmlformats.org/drawingml/2006/main">
             <a:pPr>
+              <a:buNone/>
               <a:defRPr sz="1050" b="1">
                 <a:solidFill>
                   <a:srgbClr val="93C5FD"/>
@@ -3958,6 +3968,7 @@
               </a:defRPr>
             </a:defPPr>
             <a:lvl1pPr>
+              <a:buNone/>
               <a:defRPr sz="3300" b="1">
                 <a:solidFill>
                   <a:srgbClr val="FFFFFF"/>
@@ -3965,6 +3976,7 @@
               </a:defRPr>
             </a:lvl1pPr>
             <a:lvl2pPr>
+              <a:buNone/>
               <a:defRPr sz="3300" b="1">
                 <a:solidFill>
                   <a:srgbClr val="FFFFFF"/>
@@ -3972,6 +3984,7 @@
               </a:defRPr>
             </a:lvl2pPr>
             <a:lvl3pPr>
+              <a:buNone/>
               <a:defRPr sz="3300" b="1">
                 <a:solidFill>
                   <a:srgbClr val="FFFFFF"/>
@@ -3979,6 +3992,7 @@
               </a:defRPr>
             </a:lvl3pPr>
             <a:lvl4pPr>
+              <a:buNone/>
               <a:defRPr sz="3300" b="1">
                 <a:solidFill>
                   <a:srgbClr val="FFFFFF"/>
@@ -3986,6 +4000,7 @@
               </a:defRPr>
             </a:lvl4pPr>
             <a:lvl5pPr>
+              <a:buNone/>
               <a:defRPr sz="3300" b="1">
                 <a:solidFill>
                   <a:srgbClr val="FFFFFF"/>
@@ -3993,6 +4008,7 @@
               </a:defRPr>
             </a:lvl5pPr>
             <a:lvl6pPr>
+              <a:buNone/>
               <a:defRPr sz="3300" b="1">
                 <a:solidFill>
                   <a:srgbClr val="FFFFFF"/>
@@ -4000,6 +4016,7 @@
               </a:defRPr>
             </a:lvl6pPr>
             <a:lvl7pPr>
+              <a:buNone/>
               <a:defRPr sz="3300" b="1">
                 <a:solidFill>
                   <a:srgbClr val="FFFFFF"/>
@@ -4007,6 +4024,7 @@
               </a:defRPr>
             </a:lvl7pPr>
             <a:lvl8pPr>
+              <a:buNone/>
               <a:defRPr sz="3300" b="1">
                 <a:solidFill>
                   <a:srgbClr val="FFFFFF"/>
@@ -4014,6 +4032,7 @@
               </a:defRPr>
             </a:lvl8pPr>
             <a:lvl9pPr>
+              <a:buNone/>
               <a:defRPr sz="3300" b="1">
                 <a:solidFill>
                   <a:srgbClr val="FFFFFF"/>
@@ -4023,6 +4042,7 @@
           </a:lstStyle>
           <a:p xmlns:a="http://schemas.openxmlformats.org/drawingml/2006/main">
             <a:pPr>
+              <a:buNone/>
               <a:defRPr sz="3300" b="1">
                 <a:solidFill>
                   <a:srgbClr val="FFFFFF"/>
@@ -4035,24 +4055,7 @@
                   <a:srgbClr val="FFFFFF"/>
                 </a:solidFill>
               </a:rPr>
-              <a:t>Build better UI</a:t>
-            </a:r>
-          </a:p>
-          <a:p xmlns:a="http://schemas.openxmlformats.org/drawingml/2006/main">
-            <a:pPr>
-              <a:defRPr sz="3300" b="1">
-                <a:solidFill>
-                  <a:srgbClr val="FFFFFF"/>
-                </a:solidFill>
-              </a:defRPr>
-            </a:pPr>
-            <a:r>
-              <a:rPr sz="3300" b="1">
-                <a:solidFill>
-                  <a:srgbClr val="FFFFFF"/>
-                </a:solidFill>
-              </a:rPr>
-              <a:t>automation locators</a:t>
+              <a:t>Build better UI automation locators</a:t>
             </a:r>
           </a:p>
         </p:txBody>
@@ -4096,6 +4099,7 @@
               </a:defRPr>
             </a:defPPr>
             <a:lvl1pPr>
+              <a:buNone/>
               <a:defRPr sz="1650" b="0">
                 <a:solidFill>
                   <a:srgbClr val="D4DFEE"/>
@@ -4103,6 +4107,7 @@
               </a:defRPr>
             </a:lvl1pPr>
             <a:lvl2pPr>
+              <a:buNone/>
               <a:defRPr sz="1650" b="0">
                 <a:solidFill>
                   <a:srgbClr val="D4DFEE"/>
@@ -4110,6 +4115,7 @@
               </a:defRPr>
             </a:lvl2pPr>
             <a:lvl3pPr>
+              <a:buNone/>
               <a:defRPr sz="1650" b="0">
                 <a:solidFill>
                   <a:srgbClr val="D4DFEE"/>
@@ -4117,6 +4123,7 @@
               </a:defRPr>
             </a:lvl3pPr>
             <a:lvl4pPr>
+              <a:buNone/>
               <a:defRPr sz="1650" b="0">
                 <a:solidFill>
                   <a:srgbClr val="D4DFEE"/>
@@ -4124,6 +4131,7 @@
               </a:defRPr>
             </a:lvl4pPr>
             <a:lvl5pPr>
+              <a:buNone/>
               <a:defRPr sz="1650" b="0">
                 <a:solidFill>
                   <a:srgbClr val="D4DFEE"/>
@@ -4131,6 +4139,7 @@
               </a:defRPr>
             </a:lvl5pPr>
             <a:lvl6pPr>
+              <a:buNone/>
               <a:defRPr sz="1650" b="0">
                 <a:solidFill>
                   <a:srgbClr val="D4DFEE"/>
@@ -4138,6 +4147,7 @@
               </a:defRPr>
             </a:lvl6pPr>
             <a:lvl7pPr>
+              <a:buNone/>
               <a:defRPr sz="1650" b="0">
                 <a:solidFill>
                   <a:srgbClr val="D4DFEE"/>
@@ -4145,6 +4155,7 @@
               </a:defRPr>
             </a:lvl7pPr>
             <a:lvl8pPr>
+              <a:buNone/>
               <a:defRPr sz="1650" b="0">
                 <a:solidFill>
                   <a:srgbClr val="D4DFEE"/>
@@ -4152,6 +4163,7 @@
               </a:defRPr>
             </a:lvl8pPr>
             <a:lvl9pPr>
+              <a:buNone/>
               <a:defRPr sz="1650" b="0">
                 <a:solidFill>
                   <a:srgbClr val="D4DFEE"/>
@@ -4161,6 +4173,7 @@
           </a:lstStyle>
           <a:p xmlns:a="http://schemas.openxmlformats.org/drawingml/2006/main">
             <a:pPr>
+              <a:buNone/>
               <a:defRPr sz="1650" b="0">
                 <a:solidFill>
                   <a:srgbClr val="D4DFEE"/>
@@ -4173,7 +4186,7 @@
                   <a:srgbClr val="D4DFEE"/>
                 </a:solidFill>
               </a:rPr>
-              <a:t>Generate, select, audit, and export CSS and XPath selectors in one desktop workspace.</a:t>
+              <a:t>Generate, capture, audit, and export CSS and XPath selectors in one desktop workspace.</a:t>
             </a:r>
           </a:p>
         </p:txBody>
@@ -4248,6 +4261,7 @@
               </a:defRPr>
             </a:defPPr>
             <a:lvl1pPr>
+              <a:buNone/>
               <a:defRPr sz="1200" b="0">
                 <a:solidFill>
                   <a:srgbClr val="D4DFEE"/>
@@ -4255,6 +4269,7 @@
               </a:defRPr>
             </a:lvl1pPr>
             <a:lvl2pPr>
+              <a:buNone/>
               <a:defRPr sz="1200" b="0">
                 <a:solidFill>
                   <a:srgbClr val="D4DFEE"/>
@@ -4262,6 +4277,7 @@
               </a:defRPr>
             </a:lvl2pPr>
             <a:lvl3pPr>
+              <a:buNone/>
               <a:defRPr sz="1200" b="0">
                 <a:solidFill>
                   <a:srgbClr val="D4DFEE"/>
@@ -4269,6 +4285,7 @@
               </a:defRPr>
             </a:lvl3pPr>
             <a:lvl4pPr>
+              <a:buNone/>
               <a:defRPr sz="1200" b="0">
                 <a:solidFill>
                   <a:srgbClr val="D4DFEE"/>
@@ -4276,6 +4293,7 @@
               </a:defRPr>
             </a:lvl4pPr>
             <a:lvl5pPr>
+              <a:buNone/>
               <a:defRPr sz="1200" b="0">
                 <a:solidFill>
                   <a:srgbClr val="D4DFEE"/>
@@ -4283,6 +4301,7 @@
               </a:defRPr>
             </a:lvl5pPr>
             <a:lvl6pPr>
+              <a:buNone/>
               <a:defRPr sz="1200" b="0">
                 <a:solidFill>
                   <a:srgbClr val="D4DFEE"/>
@@ -4290,6 +4309,7 @@
               </a:defRPr>
             </a:lvl6pPr>
             <a:lvl7pPr>
+              <a:buNone/>
               <a:defRPr sz="1200" b="0">
                 <a:solidFill>
                   <a:srgbClr val="D4DFEE"/>
@@ -4297,6 +4317,7 @@
               </a:defRPr>
             </a:lvl7pPr>
             <a:lvl8pPr>
+              <a:buNone/>
               <a:defRPr sz="1200" b="0">
                 <a:solidFill>
                   <a:srgbClr val="D4DFEE"/>
@@ -4304,6 +4325,7 @@
               </a:defRPr>
             </a:lvl8pPr>
             <a:lvl9pPr>
+              <a:buNone/>
               <a:defRPr sz="1200" b="0">
                 <a:solidFill>
                   <a:srgbClr val="D4DFEE"/>
@@ -4313,6 +4335,7 @@
           </a:lstStyle>
           <a:p xmlns:a="http://schemas.openxmlformats.org/drawingml/2006/main">
             <a:pPr>
+              <a:buNone/>
               <a:defRPr sz="1200" b="0">
                 <a:solidFill>
                   <a:srgbClr val="D4DFEE"/>
@@ -4325,7 +4348,7 @@
                   <a:srgbClr val="D4DFEE"/>
                 </a:solidFill>
               </a:rPr>
-              <a:t>PySide6 desktop application</a:t>
+              <a:t>Standalone Windows build available</a:t>
             </a:r>
           </a:p>
         </p:txBody>
@@ -4335,7 +4358,7 @@
           <p:cNvPr id="7" name="">
             <a:extLst xmlns:a="http://schemas.openxmlformats.org/drawingml/2006/main">
               <a:ext uri="{FF2B5EF4-FFF2-40B4-BE49-F238E27FC236}">
-                <a16:creationId xmlns:a16="http://schemas.microsoft.com/office/drawing/2014/main" id="{D4697F2A-858B-472B-B664-AF3694B59563}"/>
+                <a16:creationId xmlns:a16="http://schemas.microsoft.com/office/drawing/2014/main" id="{4A8AE192-9E7D-4BDF-976D-7B0471C624ED}"/>
               </a:ext>
             </a:extLst>
           </p:cNvPr>
@@ -4345,8 +4368,11 @@
           <p:nvPr/>
         </p:nvPicPr>
         <p:blipFill>
-          <a:blip xmlns:r="http://schemas.openxmlformats.org/officeDocument/2006/relationships" xmlns:a="http://schemas.openxmlformats.org/drawingml/2006/main" r:embed="Rdcd8de09ea464e38"/>
-          <a:stretch xmlns:a="http://schemas.openxmlformats.org/drawingml/2006/main"/>
+          <a:blip xmlns:r="http://schemas.openxmlformats.org/officeDocument/2006/relationships" xmlns:a="http://schemas.openxmlformats.org/drawingml/2006/main" r:embed="Rb0dcb949ce474fa1"/>
+          <a:srcRect xmlns:a="http://schemas.openxmlformats.org/drawingml/2006/main" l="6133" t="0" r="6133" b="0"/>
+          <a:stretch xmlns:a="http://schemas.openxmlformats.org/drawingml/2006/main">
+            <a:fillRect l="0" t="0" r="0" b="0"/>
+          </a:stretch>
         </p:blipFill>
         <p:spPr>
           <a:xfrm xmlns:a="http://schemas.openxmlformats.org/drawingml/2006/main">
@@ -4354,9 +4380,7 @@
             <a:ext cx="5334000" cy="3333750"/>
           </a:xfrm>
           <a:prstGeom xmlns:a="http://schemas.openxmlformats.org/drawingml/2006/main" prst="roundRect">
-            <a:avLst>
-              <a:gd name="adj" fmla="val 2637"/>
-            </a:avLst>
+            <a:avLst/>
           </a:prstGeom>
         </p:spPr>
       </p:pic>
@@ -4399,6 +4423,7 @@
               </a:defRPr>
             </a:defPPr>
             <a:lvl1pPr>
+              <a:buNone/>
               <a:defRPr sz="1050" b="0">
                 <a:solidFill>
                   <a:srgbClr val="A8B9D2"/>
@@ -4406,6 +4431,7 @@
               </a:defRPr>
             </a:lvl1pPr>
             <a:lvl2pPr>
+              <a:buNone/>
               <a:defRPr sz="1050" b="0">
                 <a:solidFill>
                   <a:srgbClr val="A8B9D2"/>
@@ -4413,6 +4439,7 @@
               </a:defRPr>
             </a:lvl2pPr>
             <a:lvl3pPr>
+              <a:buNone/>
               <a:defRPr sz="1050" b="0">
                 <a:solidFill>
                   <a:srgbClr val="A8B9D2"/>
@@ -4420,6 +4447,7 @@
               </a:defRPr>
             </a:lvl3pPr>
             <a:lvl4pPr>
+              <a:buNone/>
               <a:defRPr sz="1050" b="0">
                 <a:solidFill>
                   <a:srgbClr val="A8B9D2"/>
@@ -4427,6 +4455,7 @@
               </a:defRPr>
             </a:lvl4pPr>
             <a:lvl5pPr>
+              <a:buNone/>
               <a:defRPr sz="1050" b="0">
                 <a:solidFill>
                   <a:srgbClr val="A8B9D2"/>
@@ -4434,6 +4463,7 @@
               </a:defRPr>
             </a:lvl5pPr>
             <a:lvl6pPr>
+              <a:buNone/>
               <a:defRPr sz="1050" b="0">
                 <a:solidFill>
                   <a:srgbClr val="A8B9D2"/>
@@ -4441,6 +4471,7 @@
               </a:defRPr>
             </a:lvl6pPr>
             <a:lvl7pPr>
+              <a:buNone/>
               <a:defRPr sz="1050" b="0">
                 <a:solidFill>
                   <a:srgbClr val="A8B9D2"/>
@@ -4448,6 +4479,7 @@
               </a:defRPr>
             </a:lvl7pPr>
             <a:lvl8pPr>
+              <a:buNone/>
               <a:defRPr sz="1050" b="0">
                 <a:solidFill>
                   <a:srgbClr val="A8B9D2"/>
@@ -4455,6 +4487,7 @@
               </a:defRPr>
             </a:lvl8pPr>
             <a:lvl9pPr>
+              <a:buNone/>
               <a:defRPr sz="1050" b="0">
                 <a:solidFill>
                   <a:srgbClr val="A8B9D2"/>
@@ -4464,6 +4497,7 @@
           </a:lstStyle>
           <a:p xmlns:a="http://schemas.openxmlformats.org/drawingml/2006/main">
             <a:pPr>
+              <a:buNone/>
               <a:defRPr sz="1050" b="0">
                 <a:solidFill>
                   <a:srgbClr val="A8B9D2"/>
@@ -4580,6 +4614,7 @@
               </a:defRPr>
             </a:defPPr>
             <a:lvl1pPr>
+              <a:buNone/>
               <a:defRPr sz="975" b="1">
                 <a:solidFill>
                   <a:srgbClr val="2563EB"/>
@@ -4587,6 +4622,7 @@
               </a:defRPr>
             </a:lvl1pPr>
             <a:lvl2pPr>
+              <a:buNone/>
               <a:defRPr sz="975" b="1">
                 <a:solidFill>
                   <a:srgbClr val="2563EB"/>
@@ -4594,6 +4630,7 @@
               </a:defRPr>
             </a:lvl2pPr>
             <a:lvl3pPr>
+              <a:buNone/>
               <a:defRPr sz="975" b="1">
                 <a:solidFill>
                   <a:srgbClr val="2563EB"/>
@@ -4601,6 +4638,7 @@
               </a:defRPr>
             </a:lvl3pPr>
             <a:lvl4pPr>
+              <a:buNone/>
               <a:defRPr sz="975" b="1">
                 <a:solidFill>
                   <a:srgbClr val="2563EB"/>
@@ -4608,6 +4646,7 @@
               </a:defRPr>
             </a:lvl4pPr>
             <a:lvl5pPr>
+              <a:buNone/>
               <a:defRPr sz="975" b="1">
                 <a:solidFill>
                   <a:srgbClr val="2563EB"/>
@@ -4615,6 +4654,7 @@
               </a:defRPr>
             </a:lvl5pPr>
             <a:lvl6pPr>
+              <a:buNone/>
               <a:defRPr sz="975" b="1">
                 <a:solidFill>
                   <a:srgbClr val="2563EB"/>
@@ -4622,6 +4662,7 @@
               </a:defRPr>
             </a:lvl6pPr>
             <a:lvl7pPr>
+              <a:buNone/>
               <a:defRPr sz="975" b="1">
                 <a:solidFill>
                   <a:srgbClr val="2563EB"/>
@@ -4629,6 +4670,7 @@
               </a:defRPr>
             </a:lvl7pPr>
             <a:lvl8pPr>
+              <a:buNone/>
               <a:defRPr sz="975" b="1">
                 <a:solidFill>
                   <a:srgbClr val="2563EB"/>
@@ -4636,6 +4678,7 @@
               </a:defRPr>
             </a:lvl8pPr>
             <a:lvl9pPr>
+              <a:buNone/>
               <a:defRPr sz="975" b="1">
                 <a:solidFill>
                   <a:srgbClr val="2563EB"/>
@@ -4645,6 +4688,7 @@
           </a:lstStyle>
           <a:p xmlns:a="http://schemas.openxmlformats.org/drawingml/2006/main">
             <a:pPr>
+              <a:buNone/>
               <a:defRPr sz="975" b="1">
                 <a:solidFill>
                   <a:srgbClr val="2563EB"/>
@@ -4701,6 +4745,7 @@
               </a:defRPr>
             </a:defPPr>
             <a:lvl1pPr>
+              <a:buNone/>
               <a:defRPr sz="2550" b="1">
                 <a:solidFill>
                   <a:srgbClr val="172B4D"/>
@@ -4708,6 +4753,7 @@
               </a:defRPr>
             </a:lvl1pPr>
             <a:lvl2pPr>
+              <a:buNone/>
               <a:defRPr sz="2550" b="1">
                 <a:solidFill>
                   <a:srgbClr val="172B4D"/>
@@ -4715,6 +4761,7 @@
               </a:defRPr>
             </a:lvl2pPr>
             <a:lvl3pPr>
+              <a:buNone/>
               <a:defRPr sz="2550" b="1">
                 <a:solidFill>
                   <a:srgbClr val="172B4D"/>
@@ -4722,6 +4769,7 @@
               </a:defRPr>
             </a:lvl3pPr>
             <a:lvl4pPr>
+              <a:buNone/>
               <a:defRPr sz="2550" b="1">
                 <a:solidFill>
                   <a:srgbClr val="172B4D"/>
@@ -4729,6 +4777,7 @@
               </a:defRPr>
             </a:lvl4pPr>
             <a:lvl5pPr>
+              <a:buNone/>
               <a:defRPr sz="2550" b="1">
                 <a:solidFill>
                   <a:srgbClr val="172B4D"/>
@@ -4736,6 +4785,7 @@
               </a:defRPr>
             </a:lvl5pPr>
             <a:lvl6pPr>
+              <a:buNone/>
               <a:defRPr sz="2550" b="1">
                 <a:solidFill>
                   <a:srgbClr val="172B4D"/>
@@ -4743,6 +4793,7 @@
               </a:defRPr>
             </a:lvl6pPr>
             <a:lvl7pPr>
+              <a:buNone/>
               <a:defRPr sz="2550" b="1">
                 <a:solidFill>
                   <a:srgbClr val="172B4D"/>
@@ -4750,6 +4801,7 @@
               </a:defRPr>
             </a:lvl7pPr>
             <a:lvl8pPr>
+              <a:buNone/>
               <a:defRPr sz="2550" b="1">
                 <a:solidFill>
                   <a:srgbClr val="172B4D"/>
@@ -4757,6 +4809,7 @@
               </a:defRPr>
             </a:lvl8pPr>
             <a:lvl9pPr>
+              <a:buNone/>
               <a:defRPr sz="2550" b="1">
                 <a:solidFill>
                   <a:srgbClr val="172B4D"/>
@@ -4766,6 +4819,7 @@
           </a:lstStyle>
           <a:p xmlns:a="http://schemas.openxmlformats.org/drawingml/2006/main">
             <a:pPr>
+              <a:buNone/>
               <a:defRPr sz="2550" b="1">
                 <a:solidFill>
                   <a:srgbClr val="172B4D"/>
@@ -4778,7 +4832,7 @@
                   <a:srgbClr val="172B4D"/>
                 </a:solidFill>
               </a:rPr>
-              <a:t>One workflow from markup to reusable code</a:t>
+              <a:t>From captured element to reusable code</a:t>
             </a:r>
           </a:p>
         </p:txBody>
@@ -4853,6 +4907,7 @@
               </a:defRPr>
             </a:defPPr>
             <a:lvl1pPr>
+              <a:buNone/>
               <a:defRPr sz="825" b="0">
                 <a:solidFill>
                   <a:srgbClr val="5E6F89"/>
@@ -4860,6 +4915,7 @@
               </a:defRPr>
             </a:lvl1pPr>
             <a:lvl2pPr>
+              <a:buNone/>
               <a:defRPr sz="825" b="0">
                 <a:solidFill>
                   <a:srgbClr val="5E6F89"/>
@@ -4867,6 +4923,7 @@
               </a:defRPr>
             </a:lvl2pPr>
             <a:lvl3pPr>
+              <a:buNone/>
               <a:defRPr sz="825" b="0">
                 <a:solidFill>
                   <a:srgbClr val="5E6F89"/>
@@ -4874,6 +4931,7 @@
               </a:defRPr>
             </a:lvl3pPr>
             <a:lvl4pPr>
+              <a:buNone/>
               <a:defRPr sz="825" b="0">
                 <a:solidFill>
                   <a:srgbClr val="5E6F89"/>
@@ -4881,6 +4939,7 @@
               </a:defRPr>
             </a:lvl4pPr>
             <a:lvl5pPr>
+              <a:buNone/>
               <a:defRPr sz="825" b="0">
                 <a:solidFill>
                   <a:srgbClr val="5E6F89"/>
@@ -4888,6 +4947,7 @@
               </a:defRPr>
             </a:lvl5pPr>
             <a:lvl6pPr>
+              <a:buNone/>
               <a:defRPr sz="825" b="0">
                 <a:solidFill>
                   <a:srgbClr val="5E6F89"/>
@@ -4895,6 +4955,7 @@
               </a:defRPr>
             </a:lvl6pPr>
             <a:lvl7pPr>
+              <a:buNone/>
               <a:defRPr sz="825" b="0">
                 <a:solidFill>
                   <a:srgbClr val="5E6F89"/>
@@ -4902,6 +4963,7 @@
               </a:defRPr>
             </a:lvl7pPr>
             <a:lvl8pPr>
+              <a:buNone/>
               <a:defRPr sz="825" b="0">
                 <a:solidFill>
                   <a:srgbClr val="5E6F89"/>
@@ -4909,6 +4971,7 @@
               </a:defRPr>
             </a:lvl8pPr>
             <a:lvl9pPr>
+              <a:buNone/>
               <a:defRPr sz="825" b="0">
                 <a:solidFill>
                   <a:srgbClr val="5E6F89"/>
@@ -4918,6 +4981,7 @@
           </a:lstStyle>
           <a:p xmlns:a="http://schemas.openxmlformats.org/drawingml/2006/main">
             <a:pPr>
+              <a:buNone/>
               <a:defRPr sz="825" b="0">
                 <a:solidFill>
                   <a:srgbClr val="5E6F89"/>
@@ -4974,6 +5038,7 @@
               </a:defRPr>
             </a:defPPr>
             <a:lvl1pPr>
+              <a:buNone/>
               <a:defRPr sz="1575" b="0">
                 <a:solidFill>
                   <a:srgbClr val="5E6F89"/>
@@ -4981,6 +5046,7 @@
               </a:defRPr>
             </a:lvl1pPr>
             <a:lvl2pPr>
+              <a:buNone/>
               <a:defRPr sz="1575" b="0">
                 <a:solidFill>
                   <a:srgbClr val="5E6F89"/>
@@ -4988,6 +5054,7 @@
               </a:defRPr>
             </a:lvl2pPr>
             <a:lvl3pPr>
+              <a:buNone/>
               <a:defRPr sz="1575" b="0">
                 <a:solidFill>
                   <a:srgbClr val="5E6F89"/>
@@ -4995,6 +5062,7 @@
               </a:defRPr>
             </a:lvl3pPr>
             <a:lvl4pPr>
+              <a:buNone/>
               <a:defRPr sz="1575" b="0">
                 <a:solidFill>
                   <a:srgbClr val="5E6F89"/>
@@ -5002,6 +5070,7 @@
               </a:defRPr>
             </a:lvl4pPr>
             <a:lvl5pPr>
+              <a:buNone/>
               <a:defRPr sz="1575" b="0">
                 <a:solidFill>
                   <a:srgbClr val="5E6F89"/>
@@ -5009,6 +5078,7 @@
               </a:defRPr>
             </a:lvl5pPr>
             <a:lvl6pPr>
+              <a:buNone/>
               <a:defRPr sz="1575" b="0">
                 <a:solidFill>
                   <a:srgbClr val="5E6F89"/>
@@ -5016,6 +5086,7 @@
               </a:defRPr>
             </a:lvl6pPr>
             <a:lvl7pPr>
+              <a:buNone/>
               <a:defRPr sz="1575" b="0">
                 <a:solidFill>
                   <a:srgbClr val="5E6F89"/>
@@ -5023,6 +5094,7 @@
               </a:defRPr>
             </a:lvl7pPr>
             <a:lvl8pPr>
+              <a:buNone/>
               <a:defRPr sz="1575" b="0">
                 <a:solidFill>
                   <a:srgbClr val="5E6F89"/>
@@ -5030,6 +5102,7 @@
               </a:defRPr>
             </a:lvl8pPr>
             <a:lvl9pPr>
+              <a:buNone/>
               <a:defRPr sz="1575" b="0">
                 <a:solidFill>
                   <a:srgbClr val="5E6F89"/>
@@ -5039,6 +5112,7 @@
           </a:lstStyle>
           <a:p xmlns:a="http://schemas.openxmlformats.org/drawingml/2006/main">
             <a:pPr>
+              <a:buNone/>
               <a:defRPr sz="1575" b="0">
                 <a:solidFill>
                   <a:srgbClr val="5E6F89"/>
@@ -5051,7 +5125,7 @@
                   <a:srgbClr val="5E6F89"/>
                 </a:solidFill>
               </a:rPr>
-              <a:t>Turn page elements into reviewed selectors, then carry the ones you trust into code and exports.</a:t>
+              <a:t>Capture page elements, review their selectors, and carry the ones you trust into code and exports.</a:t>
             </a:r>
           </a:p>
         </p:txBody>
@@ -5128,6 +5202,7 @@
               </a:defRPr>
             </a:defPPr>
             <a:lvl1pPr>
+              <a:buNone/>
               <a:defRPr sz="1350" b="1">
                 <a:solidFill>
                   <a:srgbClr val="FFFFFF"/>
@@ -5135,6 +5210,7 @@
               </a:defRPr>
             </a:lvl1pPr>
             <a:lvl2pPr>
+              <a:buNone/>
               <a:defRPr sz="1350" b="1">
                 <a:solidFill>
                   <a:srgbClr val="FFFFFF"/>
@@ -5142,6 +5218,7 @@
               </a:defRPr>
             </a:lvl2pPr>
             <a:lvl3pPr>
+              <a:buNone/>
               <a:defRPr sz="1350" b="1">
                 <a:solidFill>
                   <a:srgbClr val="FFFFFF"/>
@@ -5149,6 +5226,7 @@
               </a:defRPr>
             </a:lvl3pPr>
             <a:lvl4pPr>
+              <a:buNone/>
               <a:defRPr sz="1350" b="1">
                 <a:solidFill>
                   <a:srgbClr val="FFFFFF"/>
@@ -5156,6 +5234,7 @@
               </a:defRPr>
             </a:lvl4pPr>
             <a:lvl5pPr>
+              <a:buNone/>
               <a:defRPr sz="1350" b="1">
                 <a:solidFill>
                   <a:srgbClr val="FFFFFF"/>
@@ -5163,6 +5242,7 @@
               </a:defRPr>
             </a:lvl5pPr>
             <a:lvl6pPr>
+              <a:buNone/>
               <a:defRPr sz="1350" b="1">
                 <a:solidFill>
                   <a:srgbClr val="FFFFFF"/>
@@ -5170,6 +5250,7 @@
               </a:defRPr>
             </a:lvl6pPr>
             <a:lvl7pPr>
+              <a:buNone/>
               <a:defRPr sz="1350" b="1">
                 <a:solidFill>
                   <a:srgbClr val="FFFFFF"/>
@@ -5177,6 +5258,7 @@
               </a:defRPr>
             </a:lvl7pPr>
             <a:lvl8pPr>
+              <a:buNone/>
               <a:defRPr sz="1350" b="1">
                 <a:solidFill>
                   <a:srgbClr val="FFFFFF"/>
@@ -5184,6 +5266,7 @@
               </a:defRPr>
             </a:lvl8pPr>
             <a:lvl9pPr>
+              <a:buNone/>
               <a:defRPr sz="1350" b="1">
                 <a:solidFill>
                   <a:srgbClr val="FFFFFF"/>
@@ -5193,6 +5276,7 @@
           </a:lstStyle>
           <a:p xmlns:a="http://schemas.openxmlformats.org/drawingml/2006/main">
             <a:pPr>
+              <a:buNone/>
               <a:defRPr sz="1350" b="1">
                 <a:solidFill>
                   <a:srgbClr val="FFFFFF"/>
@@ -5249,6 +5333,7 @@
               </a:defRPr>
             </a:defPPr>
             <a:lvl1pPr>
+              <a:buNone/>
               <a:defRPr sz="1500" b="1">
                 <a:solidFill>
                   <a:srgbClr val="172B4D"/>
@@ -5256,6 +5341,7 @@
               </a:defRPr>
             </a:lvl1pPr>
             <a:lvl2pPr>
+              <a:buNone/>
               <a:defRPr sz="1500" b="1">
                 <a:solidFill>
                   <a:srgbClr val="172B4D"/>
@@ -5263,6 +5349,7 @@
               </a:defRPr>
             </a:lvl2pPr>
             <a:lvl3pPr>
+              <a:buNone/>
               <a:defRPr sz="1500" b="1">
                 <a:solidFill>
                   <a:srgbClr val="172B4D"/>
@@ -5270,6 +5357,7 @@
               </a:defRPr>
             </a:lvl3pPr>
             <a:lvl4pPr>
+              <a:buNone/>
               <a:defRPr sz="1500" b="1">
                 <a:solidFill>
                   <a:srgbClr val="172B4D"/>
@@ -5277,6 +5365,7 @@
               </a:defRPr>
             </a:lvl4pPr>
             <a:lvl5pPr>
+              <a:buNone/>
               <a:defRPr sz="1500" b="1">
                 <a:solidFill>
                   <a:srgbClr val="172B4D"/>
@@ -5284,6 +5373,7 @@
               </a:defRPr>
             </a:lvl5pPr>
             <a:lvl6pPr>
+              <a:buNone/>
               <a:defRPr sz="1500" b="1">
                 <a:solidFill>
                   <a:srgbClr val="172B4D"/>
@@ -5291,6 +5381,7 @@
               </a:defRPr>
             </a:lvl6pPr>
             <a:lvl7pPr>
+              <a:buNone/>
               <a:defRPr sz="1500" b="1">
                 <a:solidFill>
                   <a:srgbClr val="172B4D"/>
@@ -5298,6 +5389,7 @@
               </a:defRPr>
             </a:lvl7pPr>
             <a:lvl8pPr>
+              <a:buNone/>
               <a:defRPr sz="1500" b="1">
                 <a:solidFill>
                   <a:srgbClr val="172B4D"/>
@@ -5305,6 +5397,7 @@
               </a:defRPr>
             </a:lvl8pPr>
             <a:lvl9pPr>
+              <a:buNone/>
               <a:defRPr sz="1500" b="1">
                 <a:solidFill>
                   <a:srgbClr val="172B4D"/>
@@ -5314,6 +5407,7 @@
           </a:lstStyle>
           <a:p xmlns:a="http://schemas.openxmlformats.org/drawingml/2006/main">
             <a:pPr>
+              <a:buNone/>
               <a:defRPr sz="1500" b="1">
                 <a:solidFill>
                   <a:srgbClr val="172B4D"/>
@@ -5326,7 +5420,7 @@
                   <a:srgbClr val="172B4D"/>
                 </a:solidFill>
               </a:rPr>
-              <a:t>Generate</a:t>
+              <a:t>Capture</a:t>
             </a:r>
           </a:p>
         </p:txBody>
@@ -5370,6 +5464,7 @@
               </a:defRPr>
             </a:defPPr>
             <a:lvl1pPr>
+              <a:buNone/>
               <a:defRPr sz="1275" b="0">
                 <a:solidFill>
                   <a:srgbClr val="5E6F89"/>
@@ -5377,6 +5472,7 @@
               </a:defRPr>
             </a:lvl1pPr>
             <a:lvl2pPr>
+              <a:buNone/>
               <a:defRPr sz="1275" b="0">
                 <a:solidFill>
                   <a:srgbClr val="5E6F89"/>
@@ -5384,6 +5480,7 @@
               </a:defRPr>
             </a:lvl2pPr>
             <a:lvl3pPr>
+              <a:buNone/>
               <a:defRPr sz="1275" b="0">
                 <a:solidFill>
                   <a:srgbClr val="5E6F89"/>
@@ -5391,6 +5488,7 @@
               </a:defRPr>
             </a:lvl3pPr>
             <a:lvl4pPr>
+              <a:buNone/>
               <a:defRPr sz="1275" b="0">
                 <a:solidFill>
                   <a:srgbClr val="5E6F89"/>
@@ -5398,6 +5496,7 @@
               </a:defRPr>
             </a:lvl4pPr>
             <a:lvl5pPr>
+              <a:buNone/>
               <a:defRPr sz="1275" b="0">
                 <a:solidFill>
                   <a:srgbClr val="5E6F89"/>
@@ -5405,6 +5504,7 @@
               </a:defRPr>
             </a:lvl5pPr>
             <a:lvl6pPr>
+              <a:buNone/>
               <a:defRPr sz="1275" b="0">
                 <a:solidFill>
                   <a:srgbClr val="5E6F89"/>
@@ -5412,6 +5512,7 @@
               </a:defRPr>
             </a:lvl6pPr>
             <a:lvl7pPr>
+              <a:buNone/>
               <a:defRPr sz="1275" b="0">
                 <a:solidFill>
                   <a:srgbClr val="5E6F89"/>
@@ -5419,6 +5520,7 @@
               </a:defRPr>
             </a:lvl7pPr>
             <a:lvl8pPr>
+              <a:buNone/>
               <a:defRPr sz="1275" b="0">
                 <a:solidFill>
                   <a:srgbClr val="5E6F89"/>
@@ -5426,6 +5528,7 @@
               </a:defRPr>
             </a:lvl8pPr>
             <a:lvl9pPr>
+              <a:buNone/>
               <a:defRPr sz="1275" b="0">
                 <a:solidFill>
                   <a:srgbClr val="5E6F89"/>
@@ -5435,6 +5538,7 @@
           </a:lstStyle>
           <a:p xmlns:a="http://schemas.openxmlformats.org/drawingml/2006/main">
             <a:pPr>
+              <a:buNone/>
               <a:defRPr sz="1275" b="0">
                 <a:solidFill>
                   <a:srgbClr val="5E6F89"/>
@@ -5447,7 +5551,7 @@
                   <a:srgbClr val="5E6F89"/>
                 </a:solidFill>
               </a:rPr>
-              <a:t>Create ranked CSS and XPath candidates from HTML or a live page.</a:t>
+              <a:t>Use the embedded picker, paste HTML, or scan a page for elements.</a:t>
             </a:r>
           </a:p>
         </p:txBody>
@@ -5524,6 +5628,7 @@
               </a:defRPr>
             </a:defPPr>
             <a:lvl1pPr>
+              <a:buNone/>
               <a:defRPr sz="1350" b="1">
                 <a:solidFill>
                   <a:srgbClr val="FFFFFF"/>
@@ -5531,6 +5636,7 @@
               </a:defRPr>
             </a:lvl1pPr>
             <a:lvl2pPr>
+              <a:buNone/>
               <a:defRPr sz="1350" b="1">
                 <a:solidFill>
                   <a:srgbClr val="FFFFFF"/>
@@ -5538,6 +5644,7 @@
               </a:defRPr>
             </a:lvl2pPr>
             <a:lvl3pPr>
+              <a:buNone/>
               <a:defRPr sz="1350" b="1">
                 <a:solidFill>
                   <a:srgbClr val="FFFFFF"/>
@@ -5545,6 +5652,7 @@
               </a:defRPr>
             </a:lvl3pPr>
             <a:lvl4pPr>
+              <a:buNone/>
               <a:defRPr sz="1350" b="1">
                 <a:solidFill>
                   <a:srgbClr val="FFFFFF"/>
@@ -5552,6 +5660,7 @@
               </a:defRPr>
             </a:lvl4pPr>
             <a:lvl5pPr>
+              <a:buNone/>
               <a:defRPr sz="1350" b="1">
                 <a:solidFill>
                   <a:srgbClr val="FFFFFF"/>
@@ -5559,6 +5668,7 @@
               </a:defRPr>
             </a:lvl5pPr>
             <a:lvl6pPr>
+              <a:buNone/>
               <a:defRPr sz="1350" b="1">
                 <a:solidFill>
                   <a:srgbClr val="FFFFFF"/>
@@ -5566,6 +5676,7 @@
               </a:defRPr>
             </a:lvl6pPr>
             <a:lvl7pPr>
+              <a:buNone/>
               <a:defRPr sz="1350" b="1">
                 <a:solidFill>
                   <a:srgbClr val="FFFFFF"/>
@@ -5573,6 +5684,7 @@
               </a:defRPr>
             </a:lvl7pPr>
             <a:lvl8pPr>
+              <a:buNone/>
               <a:defRPr sz="1350" b="1">
                 <a:solidFill>
                   <a:srgbClr val="FFFFFF"/>
@@ -5580,6 +5692,7 @@
               </a:defRPr>
             </a:lvl8pPr>
             <a:lvl9pPr>
+              <a:buNone/>
               <a:defRPr sz="1350" b="1">
                 <a:solidFill>
                   <a:srgbClr val="FFFFFF"/>
@@ -5589,6 +5702,7 @@
           </a:lstStyle>
           <a:p xmlns:a="http://schemas.openxmlformats.org/drawingml/2006/main">
             <a:pPr>
+              <a:buNone/>
               <a:defRPr sz="1350" b="1">
                 <a:solidFill>
                   <a:srgbClr val="FFFFFF"/>
@@ -5645,6 +5759,7 @@
               </a:defRPr>
             </a:defPPr>
             <a:lvl1pPr>
+              <a:buNone/>
               <a:defRPr sz="1500" b="1">
                 <a:solidFill>
                   <a:srgbClr val="172B4D"/>
@@ -5652,6 +5767,7 @@
               </a:defRPr>
             </a:lvl1pPr>
             <a:lvl2pPr>
+              <a:buNone/>
               <a:defRPr sz="1500" b="1">
                 <a:solidFill>
                   <a:srgbClr val="172B4D"/>
@@ -5659,6 +5775,7 @@
               </a:defRPr>
             </a:lvl2pPr>
             <a:lvl3pPr>
+              <a:buNone/>
               <a:defRPr sz="1500" b="1">
                 <a:solidFill>
                   <a:srgbClr val="172B4D"/>
@@ -5666,6 +5783,7 @@
               </a:defRPr>
             </a:lvl3pPr>
             <a:lvl4pPr>
+              <a:buNone/>
               <a:defRPr sz="1500" b="1">
                 <a:solidFill>
                   <a:srgbClr val="172B4D"/>
@@ -5673,6 +5791,7 @@
               </a:defRPr>
             </a:lvl4pPr>
             <a:lvl5pPr>
+              <a:buNone/>
               <a:defRPr sz="1500" b="1">
                 <a:solidFill>
                   <a:srgbClr val="172B4D"/>
@@ -5680,6 +5799,7 @@
               </a:defRPr>
             </a:lvl5pPr>
             <a:lvl6pPr>
+              <a:buNone/>
               <a:defRPr sz="1500" b="1">
                 <a:solidFill>
                   <a:srgbClr val="172B4D"/>
@@ -5687,6 +5807,7 @@
               </a:defRPr>
             </a:lvl6pPr>
             <a:lvl7pPr>
+              <a:buNone/>
               <a:defRPr sz="1500" b="1">
                 <a:solidFill>
                   <a:srgbClr val="172B4D"/>
@@ -5694,6 +5815,7 @@
               </a:defRPr>
             </a:lvl7pPr>
             <a:lvl8pPr>
+              <a:buNone/>
               <a:defRPr sz="1500" b="1">
                 <a:solidFill>
                   <a:srgbClr val="172B4D"/>
@@ -5701,6 +5823,7 @@
               </a:defRPr>
             </a:lvl8pPr>
             <a:lvl9pPr>
+              <a:buNone/>
               <a:defRPr sz="1500" b="1">
                 <a:solidFill>
                   <a:srgbClr val="172B4D"/>
@@ -5710,6 +5833,7 @@
           </a:lstStyle>
           <a:p xmlns:a="http://schemas.openxmlformats.org/drawingml/2006/main">
             <a:pPr>
+              <a:buNone/>
               <a:defRPr sz="1500" b="1">
                 <a:solidFill>
                   <a:srgbClr val="172B4D"/>
@@ -5722,7 +5846,7 @@
                   <a:srgbClr val="172B4D"/>
                 </a:solidFill>
               </a:rPr>
-              <a:t>Choose</a:t>
+              <a:t>Review</a:t>
             </a:r>
           </a:p>
         </p:txBody>
@@ -5766,6 +5890,7 @@
               </a:defRPr>
             </a:defPPr>
             <a:lvl1pPr>
+              <a:buNone/>
               <a:defRPr sz="1275" b="0">
                 <a:solidFill>
                   <a:srgbClr val="5E6F89"/>
@@ -5773,6 +5898,7 @@
               </a:defRPr>
             </a:lvl1pPr>
             <a:lvl2pPr>
+              <a:buNone/>
               <a:defRPr sz="1275" b="0">
                 <a:solidFill>
                   <a:srgbClr val="5E6F89"/>
@@ -5780,6 +5906,7 @@
               </a:defRPr>
             </a:lvl2pPr>
             <a:lvl3pPr>
+              <a:buNone/>
               <a:defRPr sz="1275" b="0">
                 <a:solidFill>
                   <a:srgbClr val="5E6F89"/>
@@ -5787,6 +5914,7 @@
               </a:defRPr>
             </a:lvl3pPr>
             <a:lvl4pPr>
+              <a:buNone/>
               <a:defRPr sz="1275" b="0">
                 <a:solidFill>
                   <a:srgbClr val="5E6F89"/>
@@ -5794,6 +5922,7 @@
               </a:defRPr>
             </a:lvl4pPr>
             <a:lvl5pPr>
+              <a:buNone/>
               <a:defRPr sz="1275" b="0">
                 <a:solidFill>
                   <a:srgbClr val="5E6F89"/>
@@ -5801,6 +5930,7 @@
               </a:defRPr>
             </a:lvl5pPr>
             <a:lvl6pPr>
+              <a:buNone/>
               <a:defRPr sz="1275" b="0">
                 <a:solidFill>
                   <a:srgbClr val="5E6F89"/>
@@ -5808,6 +5938,7 @@
               </a:defRPr>
             </a:lvl6pPr>
             <a:lvl7pPr>
+              <a:buNone/>
               <a:defRPr sz="1275" b="0">
                 <a:solidFill>
                   <a:srgbClr val="5E6F89"/>
@@ -5815,6 +5946,7 @@
               </a:defRPr>
             </a:lvl7pPr>
             <a:lvl8pPr>
+              <a:buNone/>
               <a:defRPr sz="1275" b="0">
                 <a:solidFill>
                   <a:srgbClr val="5E6F89"/>
@@ -5822,6 +5954,7 @@
               </a:defRPr>
             </a:lvl8pPr>
             <a:lvl9pPr>
+              <a:buNone/>
               <a:defRPr sz="1275" b="0">
                 <a:solidFill>
                   <a:srgbClr val="5E6F89"/>
@@ -5831,6 +5964,7 @@
           </a:lstStyle>
           <a:p xmlns:a="http://schemas.openxmlformats.org/drawingml/2006/main">
             <a:pPr>
+              <a:buNone/>
               <a:defRPr sz="1275" b="0">
                 <a:solidFill>
                   <a:srgbClr val="5E6F89"/>
@@ -5843,7 +5977,7 @@
                   <a:srgbClr val="5E6F89"/>
                 </a:solidFill>
               </a:rPr>
-              <a:t>Select individual results or mark all generated selectors.</a:t>
+              <a:t>Inspect ranked locator candidates and select one, several, or all.</a:t>
             </a:r>
           </a:p>
         </p:txBody>
@@ -5920,6 +6054,7 @@
               </a:defRPr>
             </a:defPPr>
             <a:lvl1pPr>
+              <a:buNone/>
               <a:defRPr sz="1350" b="1">
                 <a:solidFill>
                   <a:srgbClr val="FFFFFF"/>
@@ -5927,6 +6062,7 @@
               </a:defRPr>
             </a:lvl1pPr>
             <a:lvl2pPr>
+              <a:buNone/>
               <a:defRPr sz="1350" b="1">
                 <a:solidFill>
                   <a:srgbClr val="FFFFFF"/>
@@ -5934,6 +6070,7 @@
               </a:defRPr>
             </a:lvl2pPr>
             <a:lvl3pPr>
+              <a:buNone/>
               <a:defRPr sz="1350" b="1">
                 <a:solidFill>
                   <a:srgbClr val="FFFFFF"/>
@@ -5941,6 +6078,7 @@
               </a:defRPr>
             </a:lvl3pPr>
             <a:lvl4pPr>
+              <a:buNone/>
               <a:defRPr sz="1350" b="1">
                 <a:solidFill>
                   <a:srgbClr val="FFFFFF"/>
@@ -5948,6 +6086,7 @@
               </a:defRPr>
             </a:lvl4pPr>
             <a:lvl5pPr>
+              <a:buNone/>
               <a:defRPr sz="1350" b="1">
                 <a:solidFill>
                   <a:srgbClr val="FFFFFF"/>
@@ -5955,6 +6094,7 @@
               </a:defRPr>
             </a:lvl5pPr>
             <a:lvl6pPr>
+              <a:buNone/>
               <a:defRPr sz="1350" b="1">
                 <a:solidFill>
                   <a:srgbClr val="FFFFFF"/>
@@ -5962,6 +6102,7 @@
               </a:defRPr>
             </a:lvl6pPr>
             <a:lvl7pPr>
+              <a:buNone/>
               <a:defRPr sz="1350" b="1">
                 <a:solidFill>
                   <a:srgbClr val="FFFFFF"/>
@@ -5969,6 +6110,7 @@
               </a:defRPr>
             </a:lvl7pPr>
             <a:lvl8pPr>
+              <a:buNone/>
               <a:defRPr sz="1350" b="1">
                 <a:solidFill>
                   <a:srgbClr val="FFFFFF"/>
@@ -5976,6 +6118,7 @@
               </a:defRPr>
             </a:lvl8pPr>
             <a:lvl9pPr>
+              <a:buNone/>
               <a:defRPr sz="1350" b="1">
                 <a:solidFill>
                   <a:srgbClr val="FFFFFF"/>
@@ -5985,6 +6128,7 @@
           </a:lstStyle>
           <a:p xmlns:a="http://schemas.openxmlformats.org/drawingml/2006/main">
             <a:pPr>
+              <a:buNone/>
               <a:defRPr sz="1350" b="1">
                 <a:solidFill>
                   <a:srgbClr val="FFFFFF"/>
@@ -6041,6 +6185,7 @@
               </a:defRPr>
             </a:defPPr>
             <a:lvl1pPr>
+              <a:buNone/>
               <a:defRPr sz="1500" b="1">
                 <a:solidFill>
                   <a:srgbClr val="172B4D"/>
@@ -6048,6 +6193,7 @@
               </a:defRPr>
             </a:lvl1pPr>
             <a:lvl2pPr>
+              <a:buNone/>
               <a:defRPr sz="1500" b="1">
                 <a:solidFill>
                   <a:srgbClr val="172B4D"/>
@@ -6055,6 +6201,7 @@
               </a:defRPr>
             </a:lvl2pPr>
             <a:lvl3pPr>
+              <a:buNone/>
               <a:defRPr sz="1500" b="1">
                 <a:solidFill>
                   <a:srgbClr val="172B4D"/>
@@ -6062,6 +6209,7 @@
               </a:defRPr>
             </a:lvl3pPr>
             <a:lvl4pPr>
+              <a:buNone/>
               <a:defRPr sz="1500" b="1">
                 <a:solidFill>
                   <a:srgbClr val="172B4D"/>
@@ -6069,6 +6217,7 @@
               </a:defRPr>
             </a:lvl4pPr>
             <a:lvl5pPr>
+              <a:buNone/>
               <a:defRPr sz="1500" b="1">
                 <a:solidFill>
                   <a:srgbClr val="172B4D"/>
@@ -6076,6 +6225,7 @@
               </a:defRPr>
             </a:lvl5pPr>
             <a:lvl6pPr>
+              <a:buNone/>
               <a:defRPr sz="1500" b="1">
                 <a:solidFill>
                   <a:srgbClr val="172B4D"/>
@@ -6083,6 +6233,7 @@
               </a:defRPr>
             </a:lvl6pPr>
             <a:lvl7pPr>
+              <a:buNone/>
               <a:defRPr sz="1500" b="1">
                 <a:solidFill>
                   <a:srgbClr val="172B4D"/>
@@ -6090,6 +6241,7 @@
               </a:defRPr>
             </a:lvl7pPr>
             <a:lvl8pPr>
+              <a:buNone/>
               <a:defRPr sz="1500" b="1">
                 <a:solidFill>
                   <a:srgbClr val="172B4D"/>
@@ -6097,6 +6249,7 @@
               </a:defRPr>
             </a:lvl8pPr>
             <a:lvl9pPr>
+              <a:buNone/>
               <a:defRPr sz="1500" b="1">
                 <a:solidFill>
                   <a:srgbClr val="172B4D"/>
@@ -6106,6 +6259,7 @@
           </a:lstStyle>
           <a:p xmlns:a="http://schemas.openxmlformats.org/drawingml/2006/main">
             <a:pPr>
+              <a:buNone/>
               <a:defRPr sz="1500" b="1">
                 <a:solidFill>
                   <a:srgbClr val="172B4D"/>
@@ -6162,6 +6316,7 @@
               </a:defRPr>
             </a:defPPr>
             <a:lvl1pPr>
+              <a:buNone/>
               <a:defRPr sz="1275" b="0">
                 <a:solidFill>
                   <a:srgbClr val="5E6F89"/>
@@ -6169,6 +6324,7 @@
               </a:defRPr>
             </a:lvl1pPr>
             <a:lvl2pPr>
+              <a:buNone/>
               <a:defRPr sz="1275" b="0">
                 <a:solidFill>
                   <a:srgbClr val="5E6F89"/>
@@ -6176,6 +6332,7 @@
               </a:defRPr>
             </a:lvl2pPr>
             <a:lvl3pPr>
+              <a:buNone/>
               <a:defRPr sz="1275" b="0">
                 <a:solidFill>
                   <a:srgbClr val="5E6F89"/>
@@ -6183,6 +6340,7 @@
               </a:defRPr>
             </a:lvl3pPr>
             <a:lvl4pPr>
+              <a:buNone/>
               <a:defRPr sz="1275" b="0">
                 <a:solidFill>
                   <a:srgbClr val="5E6F89"/>
@@ -6190,6 +6348,7 @@
               </a:defRPr>
             </a:lvl4pPr>
             <a:lvl5pPr>
+              <a:buNone/>
               <a:defRPr sz="1275" b="0">
                 <a:solidFill>
                   <a:srgbClr val="5E6F89"/>
@@ -6197,6 +6356,7 @@
               </a:defRPr>
             </a:lvl5pPr>
             <a:lvl6pPr>
+              <a:buNone/>
               <a:defRPr sz="1275" b="0">
                 <a:solidFill>
                   <a:srgbClr val="5E6F89"/>
@@ -6204,6 +6364,7 @@
               </a:defRPr>
             </a:lvl6pPr>
             <a:lvl7pPr>
+              <a:buNone/>
               <a:defRPr sz="1275" b="0">
                 <a:solidFill>
                   <a:srgbClr val="5E6F89"/>
@@ -6211,6 +6372,7 @@
               </a:defRPr>
             </a:lvl7pPr>
             <a:lvl8pPr>
+              <a:buNone/>
               <a:defRPr sz="1275" b="0">
                 <a:solidFill>
                   <a:srgbClr val="5E6F89"/>
@@ -6218,6 +6380,7 @@
               </a:defRPr>
             </a:lvl8pPr>
             <a:lvl9pPr>
+              <a:buNone/>
               <a:defRPr sz="1275" b="0">
                 <a:solidFill>
                   <a:srgbClr val="5E6F89"/>
@@ -6227,6 +6390,7 @@
           </a:lstStyle>
           <a:p xmlns:a="http://schemas.openxmlformats.org/drawingml/2006/main">
             <a:pPr>
+              <a:buNone/>
               <a:defRPr sz="1275" b="0">
                 <a:solidFill>
                   <a:srgbClr val="5E6F89"/>
@@ -6239,7 +6403,7 @@
                   <a:srgbClr val="5E6F89"/>
                 </a:solidFill>
               </a:rPr>
-              <a:t>Create Page Objects with names that match your test code.</a:t>
+              <a:t>Build Page Objects and give each locator a useful variable name.</a:t>
             </a:r>
           </a:p>
         </p:txBody>
@@ -6316,6 +6480,7 @@
               </a:defRPr>
             </a:defPPr>
             <a:lvl1pPr>
+              <a:buNone/>
               <a:defRPr sz="1350" b="1">
                 <a:solidFill>
                   <a:srgbClr val="FFFFFF"/>
@@ -6323,6 +6488,7 @@
               </a:defRPr>
             </a:lvl1pPr>
             <a:lvl2pPr>
+              <a:buNone/>
               <a:defRPr sz="1350" b="1">
                 <a:solidFill>
                   <a:srgbClr val="FFFFFF"/>
@@ -6330,6 +6496,7 @@
               </a:defRPr>
             </a:lvl2pPr>
             <a:lvl3pPr>
+              <a:buNone/>
               <a:defRPr sz="1350" b="1">
                 <a:solidFill>
                   <a:srgbClr val="FFFFFF"/>
@@ -6337,6 +6504,7 @@
               </a:defRPr>
             </a:lvl3pPr>
             <a:lvl4pPr>
+              <a:buNone/>
               <a:defRPr sz="1350" b="1">
                 <a:solidFill>
                   <a:srgbClr val="FFFFFF"/>
@@ -6344,6 +6512,7 @@
               </a:defRPr>
             </a:lvl4pPr>
             <a:lvl5pPr>
+              <a:buNone/>
               <a:defRPr sz="1350" b="1">
                 <a:solidFill>
                   <a:srgbClr val="FFFFFF"/>
@@ -6351,6 +6520,7 @@
               </a:defRPr>
             </a:lvl5pPr>
             <a:lvl6pPr>
+              <a:buNone/>
               <a:defRPr sz="1350" b="1">
                 <a:solidFill>
                   <a:srgbClr val="FFFFFF"/>
@@ -6358,6 +6528,7 @@
               </a:defRPr>
             </a:lvl6pPr>
             <a:lvl7pPr>
+              <a:buNone/>
               <a:defRPr sz="1350" b="1">
                 <a:solidFill>
                   <a:srgbClr val="FFFFFF"/>
@@ -6365,6 +6536,7 @@
               </a:defRPr>
             </a:lvl7pPr>
             <a:lvl8pPr>
+              <a:buNone/>
               <a:defRPr sz="1350" b="1">
                 <a:solidFill>
                   <a:srgbClr val="FFFFFF"/>
@@ -6372,6 +6544,7 @@
               </a:defRPr>
             </a:lvl8pPr>
             <a:lvl9pPr>
+              <a:buNone/>
               <a:defRPr sz="1350" b="1">
                 <a:solidFill>
                   <a:srgbClr val="FFFFFF"/>
@@ -6381,6 +6554,7 @@
           </a:lstStyle>
           <a:p xmlns:a="http://schemas.openxmlformats.org/drawingml/2006/main">
             <a:pPr>
+              <a:buNone/>
               <a:defRPr sz="1350" b="1">
                 <a:solidFill>
                   <a:srgbClr val="FFFFFF"/>
@@ -6437,6 +6611,7 @@
               </a:defRPr>
             </a:defPPr>
             <a:lvl1pPr>
+              <a:buNone/>
               <a:defRPr sz="1500" b="1">
                 <a:solidFill>
                   <a:srgbClr val="172B4D"/>
@@ -6444,6 +6619,7 @@
               </a:defRPr>
             </a:lvl1pPr>
             <a:lvl2pPr>
+              <a:buNone/>
               <a:defRPr sz="1500" b="1">
                 <a:solidFill>
                   <a:srgbClr val="172B4D"/>
@@ -6451,6 +6627,7 @@
               </a:defRPr>
             </a:lvl2pPr>
             <a:lvl3pPr>
+              <a:buNone/>
               <a:defRPr sz="1500" b="1">
                 <a:solidFill>
                   <a:srgbClr val="172B4D"/>
@@ -6458,6 +6635,7 @@
               </a:defRPr>
             </a:lvl3pPr>
             <a:lvl4pPr>
+              <a:buNone/>
               <a:defRPr sz="1500" b="1">
                 <a:solidFill>
                   <a:srgbClr val="172B4D"/>
@@ -6465,6 +6643,7 @@
               </a:defRPr>
             </a:lvl4pPr>
             <a:lvl5pPr>
+              <a:buNone/>
               <a:defRPr sz="1500" b="1">
                 <a:solidFill>
                   <a:srgbClr val="172B4D"/>
@@ -6472,6 +6651,7 @@
               </a:defRPr>
             </a:lvl5pPr>
             <a:lvl6pPr>
+              <a:buNone/>
               <a:defRPr sz="1500" b="1">
                 <a:solidFill>
                   <a:srgbClr val="172B4D"/>
@@ -6479,6 +6659,7 @@
               </a:defRPr>
             </a:lvl6pPr>
             <a:lvl7pPr>
+              <a:buNone/>
               <a:defRPr sz="1500" b="1">
                 <a:solidFill>
                   <a:srgbClr val="172B4D"/>
@@ -6486,6 +6667,7 @@
               </a:defRPr>
             </a:lvl7pPr>
             <a:lvl8pPr>
+              <a:buNone/>
               <a:defRPr sz="1500" b="1">
                 <a:solidFill>
                   <a:srgbClr val="172B4D"/>
@@ -6493,6 +6675,7 @@
               </a:defRPr>
             </a:lvl8pPr>
             <a:lvl9pPr>
+              <a:buNone/>
               <a:defRPr sz="1500" b="1">
                 <a:solidFill>
                   <a:srgbClr val="172B4D"/>
@@ -6502,6 +6685,7 @@
           </a:lstStyle>
           <a:p xmlns:a="http://schemas.openxmlformats.org/drawingml/2006/main">
             <a:pPr>
+              <a:buNone/>
               <a:defRPr sz="1500" b="1">
                 <a:solidFill>
                   <a:srgbClr val="172B4D"/>
@@ -6514,7 +6698,7 @@
                   <a:srgbClr val="172B4D"/>
                 </a:solidFill>
               </a:rPr>
-              <a:t>Review</a:t>
+              <a:t>Validate</a:t>
             </a:r>
           </a:p>
         </p:txBody>
@@ -6558,6 +6742,7 @@
               </a:defRPr>
             </a:defPPr>
             <a:lvl1pPr>
+              <a:buNone/>
               <a:defRPr sz="1275" b="0">
                 <a:solidFill>
                   <a:srgbClr val="5E6F89"/>
@@ -6565,6 +6750,7 @@
               </a:defRPr>
             </a:lvl1pPr>
             <a:lvl2pPr>
+              <a:buNone/>
               <a:defRPr sz="1275" b="0">
                 <a:solidFill>
                   <a:srgbClr val="5E6F89"/>
@@ -6572,6 +6758,7 @@
               </a:defRPr>
             </a:lvl2pPr>
             <a:lvl3pPr>
+              <a:buNone/>
               <a:defRPr sz="1275" b="0">
                 <a:solidFill>
                   <a:srgbClr val="5E6F89"/>
@@ -6579,6 +6766,7 @@
               </a:defRPr>
             </a:lvl3pPr>
             <a:lvl4pPr>
+              <a:buNone/>
               <a:defRPr sz="1275" b="0">
                 <a:solidFill>
                   <a:srgbClr val="5E6F89"/>
@@ -6586,6 +6774,7 @@
               </a:defRPr>
             </a:lvl4pPr>
             <a:lvl5pPr>
+              <a:buNone/>
               <a:defRPr sz="1275" b="0">
                 <a:solidFill>
                   <a:srgbClr val="5E6F89"/>
@@ -6593,6 +6782,7 @@
               </a:defRPr>
             </a:lvl5pPr>
             <a:lvl6pPr>
+              <a:buNone/>
               <a:defRPr sz="1275" b="0">
                 <a:solidFill>
                   <a:srgbClr val="5E6F89"/>
@@ -6600,6 +6790,7 @@
               </a:defRPr>
             </a:lvl6pPr>
             <a:lvl7pPr>
+              <a:buNone/>
               <a:defRPr sz="1275" b="0">
                 <a:solidFill>
                   <a:srgbClr val="5E6F89"/>
@@ -6607,6 +6798,7 @@
               </a:defRPr>
             </a:lvl7pPr>
             <a:lvl8pPr>
+              <a:buNone/>
               <a:defRPr sz="1275" b="0">
                 <a:solidFill>
                   <a:srgbClr val="5E6F89"/>
@@ -6614,6 +6806,7 @@
               </a:defRPr>
             </a:lvl8pPr>
             <a:lvl9pPr>
+              <a:buNone/>
               <a:defRPr sz="1275" b="0">
                 <a:solidFill>
                   <a:srgbClr val="5E6F89"/>
@@ -6623,6 +6816,7 @@
           </a:lstStyle>
           <a:p xmlns:a="http://schemas.openxmlformats.org/drawingml/2006/main">
             <a:pPr>
+              <a:buNone/>
               <a:defRPr sz="1275" b="0">
                 <a:solidFill>
                   <a:srgbClr val="5E6F89"/>
@@ -6635,7 +6829,7 @@
                   <a:srgbClr val="5E6F89"/>
                 </a:solidFill>
               </a:rPr>
-              <a:t>Validate locators and inspect snapshot-based fallback ideas.</a:t>
+              <a:t>Run Health Audit and live tests against the page when available.</a:t>
             </a:r>
           </a:p>
         </p:txBody>
@@ -6712,6 +6906,7 @@
               </a:defRPr>
             </a:defPPr>
             <a:lvl1pPr>
+              <a:buNone/>
               <a:defRPr sz="1350" b="1">
                 <a:solidFill>
                   <a:srgbClr val="FFFFFF"/>
@@ -6719,6 +6914,7 @@
               </a:defRPr>
             </a:lvl1pPr>
             <a:lvl2pPr>
+              <a:buNone/>
               <a:defRPr sz="1350" b="1">
                 <a:solidFill>
                   <a:srgbClr val="FFFFFF"/>
@@ -6726,6 +6922,7 @@
               </a:defRPr>
             </a:lvl2pPr>
             <a:lvl3pPr>
+              <a:buNone/>
               <a:defRPr sz="1350" b="1">
                 <a:solidFill>
                   <a:srgbClr val="FFFFFF"/>
@@ -6733,6 +6930,7 @@
               </a:defRPr>
             </a:lvl3pPr>
             <a:lvl4pPr>
+              <a:buNone/>
               <a:defRPr sz="1350" b="1">
                 <a:solidFill>
                   <a:srgbClr val="FFFFFF"/>
@@ -6740,6 +6938,7 @@
               </a:defRPr>
             </a:lvl4pPr>
             <a:lvl5pPr>
+              <a:buNone/>
               <a:defRPr sz="1350" b="1">
                 <a:solidFill>
                   <a:srgbClr val="FFFFFF"/>
@@ -6747,6 +6946,7 @@
               </a:defRPr>
             </a:lvl5pPr>
             <a:lvl6pPr>
+              <a:buNone/>
               <a:defRPr sz="1350" b="1">
                 <a:solidFill>
                   <a:srgbClr val="FFFFFF"/>
@@ -6754,6 +6954,7 @@
               </a:defRPr>
             </a:lvl6pPr>
             <a:lvl7pPr>
+              <a:buNone/>
               <a:defRPr sz="1350" b="1">
                 <a:solidFill>
                   <a:srgbClr val="FFFFFF"/>
@@ -6761,6 +6962,7 @@
               </a:defRPr>
             </a:lvl7pPr>
             <a:lvl8pPr>
+              <a:buNone/>
               <a:defRPr sz="1350" b="1">
                 <a:solidFill>
                   <a:srgbClr val="FFFFFF"/>
@@ -6768,6 +6970,7 @@
               </a:defRPr>
             </a:lvl8pPr>
             <a:lvl9pPr>
+              <a:buNone/>
               <a:defRPr sz="1350" b="1">
                 <a:solidFill>
                   <a:srgbClr val="FFFFFF"/>
@@ -6777,6 +6980,7 @@
           </a:lstStyle>
           <a:p xmlns:a="http://schemas.openxmlformats.org/drawingml/2006/main">
             <a:pPr>
+              <a:buNone/>
               <a:defRPr sz="1350" b="1">
                 <a:solidFill>
                   <a:srgbClr val="FFFFFF"/>
@@ -6833,6 +7037,7 @@
               </a:defRPr>
             </a:defPPr>
             <a:lvl1pPr>
+              <a:buNone/>
               <a:defRPr sz="1500" b="1">
                 <a:solidFill>
                   <a:srgbClr val="172B4D"/>
@@ -6840,6 +7045,7 @@
               </a:defRPr>
             </a:lvl1pPr>
             <a:lvl2pPr>
+              <a:buNone/>
               <a:defRPr sz="1500" b="1">
                 <a:solidFill>
                   <a:srgbClr val="172B4D"/>
@@ -6847,6 +7053,7 @@
               </a:defRPr>
             </a:lvl2pPr>
             <a:lvl3pPr>
+              <a:buNone/>
               <a:defRPr sz="1500" b="1">
                 <a:solidFill>
                   <a:srgbClr val="172B4D"/>
@@ -6854,6 +7061,7 @@
               </a:defRPr>
             </a:lvl3pPr>
             <a:lvl4pPr>
+              <a:buNone/>
               <a:defRPr sz="1500" b="1">
                 <a:solidFill>
                   <a:srgbClr val="172B4D"/>
@@ -6861,6 +7069,7 @@
               </a:defRPr>
             </a:lvl4pPr>
             <a:lvl5pPr>
+              <a:buNone/>
               <a:defRPr sz="1500" b="1">
                 <a:solidFill>
                   <a:srgbClr val="172B4D"/>
@@ -6868,6 +7077,7 @@
               </a:defRPr>
             </a:lvl5pPr>
             <a:lvl6pPr>
+              <a:buNone/>
               <a:defRPr sz="1500" b="1">
                 <a:solidFill>
                   <a:srgbClr val="172B4D"/>
@@ -6875,6 +7085,7 @@
               </a:defRPr>
             </a:lvl6pPr>
             <a:lvl7pPr>
+              <a:buNone/>
               <a:defRPr sz="1500" b="1">
                 <a:solidFill>
                   <a:srgbClr val="172B4D"/>
@@ -6882,6 +7093,7 @@
               </a:defRPr>
             </a:lvl7pPr>
             <a:lvl8pPr>
+              <a:buNone/>
               <a:defRPr sz="1500" b="1">
                 <a:solidFill>
                   <a:srgbClr val="172B4D"/>
@@ -6889,6 +7101,7 @@
               </a:defRPr>
             </a:lvl8pPr>
             <a:lvl9pPr>
+              <a:buNone/>
               <a:defRPr sz="1500" b="1">
                 <a:solidFill>
                   <a:srgbClr val="172B4D"/>
@@ -6898,6 +7111,7 @@
           </a:lstStyle>
           <a:p xmlns:a="http://schemas.openxmlformats.org/drawingml/2006/main">
             <a:pPr>
+              <a:buNone/>
               <a:defRPr sz="1500" b="1">
                 <a:solidFill>
                   <a:srgbClr val="172B4D"/>
@@ -6954,6 +7168,7 @@
               </a:defRPr>
             </a:defPPr>
             <a:lvl1pPr>
+              <a:buNone/>
               <a:defRPr sz="1275" b="0">
                 <a:solidFill>
                   <a:srgbClr val="5E6F89"/>
@@ -6961,6 +7176,7 @@
               </a:defRPr>
             </a:lvl1pPr>
             <a:lvl2pPr>
+              <a:buNone/>
               <a:defRPr sz="1275" b="0">
                 <a:solidFill>
                   <a:srgbClr val="5E6F89"/>
@@ -6968,6 +7184,7 @@
               </a:defRPr>
             </a:lvl2pPr>
             <a:lvl3pPr>
+              <a:buNone/>
               <a:defRPr sz="1275" b="0">
                 <a:solidFill>
                   <a:srgbClr val="5E6F89"/>
@@ -6975,6 +7192,7 @@
               </a:defRPr>
             </a:lvl3pPr>
             <a:lvl4pPr>
+              <a:buNone/>
               <a:defRPr sz="1275" b="0">
                 <a:solidFill>
                   <a:srgbClr val="5E6F89"/>
@@ -6982,6 +7200,7 @@
               </a:defRPr>
             </a:lvl4pPr>
             <a:lvl5pPr>
+              <a:buNone/>
               <a:defRPr sz="1275" b="0">
                 <a:solidFill>
                   <a:srgbClr val="5E6F89"/>
@@ -6989,6 +7208,7 @@
               </a:defRPr>
             </a:lvl5pPr>
             <a:lvl6pPr>
+              <a:buNone/>
               <a:defRPr sz="1275" b="0">
                 <a:solidFill>
                   <a:srgbClr val="5E6F89"/>
@@ -6996,6 +7216,7 @@
               </a:defRPr>
             </a:lvl6pPr>
             <a:lvl7pPr>
+              <a:buNone/>
               <a:defRPr sz="1275" b="0">
                 <a:solidFill>
                   <a:srgbClr val="5E6F89"/>
@@ -7003,6 +7224,7 @@
               </a:defRPr>
             </a:lvl7pPr>
             <a:lvl8pPr>
+              <a:buNone/>
               <a:defRPr sz="1275" b="0">
                 <a:solidFill>
                   <a:srgbClr val="5E6F89"/>
@@ -7010,6 +7232,7 @@
               </a:defRPr>
             </a:lvl8pPr>
             <a:lvl9pPr>
+              <a:buNone/>
               <a:defRPr sz="1275" b="0">
                 <a:solidFill>
                   <a:srgbClr val="5E6F89"/>
@@ -7019,6 +7242,7 @@
           </a:lstStyle>
           <a:p xmlns:a="http://schemas.openxmlformats.org/drawingml/2006/main">
             <a:pPr>
+              <a:buNone/>
               <a:defRPr sz="1275" b="0">
                 <a:solidFill>
                   <a:srgbClr val="5E6F89"/>
@@ -7031,7 +7255,7 @@
                   <a:srgbClr val="5E6F89"/>
                 </a:solidFill>
               </a:rPr>
-              <a:t>Share locator data through CSV and formatted XLSX files.</a:t>
+              <a:t>Export the selected locator data to CSV or formatted Excel.</a:t>
             </a:r>
           </a:p>
         </p:txBody>
@@ -7135,6 +7359,7 @@
               </a:defRPr>
             </a:defPPr>
             <a:lvl1pPr>
+              <a:buNone/>
               <a:defRPr sz="975" b="1">
                 <a:solidFill>
                   <a:srgbClr val="2563EB"/>
@@ -7142,6 +7367,7 @@
               </a:defRPr>
             </a:lvl1pPr>
             <a:lvl2pPr>
+              <a:buNone/>
               <a:defRPr sz="975" b="1">
                 <a:solidFill>
                   <a:srgbClr val="2563EB"/>
@@ -7149,6 +7375,7 @@
               </a:defRPr>
             </a:lvl2pPr>
             <a:lvl3pPr>
+              <a:buNone/>
               <a:defRPr sz="975" b="1">
                 <a:solidFill>
                   <a:srgbClr val="2563EB"/>
@@ -7156,6 +7383,7 @@
               </a:defRPr>
             </a:lvl3pPr>
             <a:lvl4pPr>
+              <a:buNone/>
               <a:defRPr sz="975" b="1">
                 <a:solidFill>
                   <a:srgbClr val="2563EB"/>
@@ -7163,6 +7391,7 @@
               </a:defRPr>
             </a:lvl4pPr>
             <a:lvl5pPr>
+              <a:buNone/>
               <a:defRPr sz="975" b="1">
                 <a:solidFill>
                   <a:srgbClr val="2563EB"/>
@@ -7170,6 +7399,7 @@
               </a:defRPr>
             </a:lvl5pPr>
             <a:lvl6pPr>
+              <a:buNone/>
               <a:defRPr sz="975" b="1">
                 <a:solidFill>
                   <a:srgbClr val="2563EB"/>
@@ -7177,6 +7407,7 @@
               </a:defRPr>
             </a:lvl6pPr>
             <a:lvl7pPr>
+              <a:buNone/>
               <a:defRPr sz="975" b="1">
                 <a:solidFill>
                   <a:srgbClr val="2563EB"/>
@@ -7184,6 +7415,7 @@
               </a:defRPr>
             </a:lvl7pPr>
             <a:lvl8pPr>
+              <a:buNone/>
               <a:defRPr sz="975" b="1">
                 <a:solidFill>
                   <a:srgbClr val="2563EB"/>
@@ -7191,6 +7423,7 @@
               </a:defRPr>
             </a:lvl8pPr>
             <a:lvl9pPr>
+              <a:buNone/>
               <a:defRPr sz="975" b="1">
                 <a:solidFill>
                   <a:srgbClr val="2563EB"/>
@@ -7200,6 +7433,7 @@
           </a:lstStyle>
           <a:p xmlns:a="http://schemas.openxmlformats.org/drawingml/2006/main">
             <a:pPr>
+              <a:buNone/>
               <a:defRPr sz="975" b="1">
                 <a:solidFill>
                   <a:srgbClr val="2563EB"/>
@@ -7256,6 +7490,7 @@
               </a:defRPr>
             </a:defPPr>
             <a:lvl1pPr>
+              <a:buNone/>
               <a:defRPr sz="2550" b="1">
                 <a:solidFill>
                   <a:srgbClr val="172B4D"/>
@@ -7263,6 +7498,7 @@
               </a:defRPr>
             </a:lvl1pPr>
             <a:lvl2pPr>
+              <a:buNone/>
               <a:defRPr sz="2550" b="1">
                 <a:solidFill>
                   <a:srgbClr val="172B4D"/>
@@ -7270,6 +7506,7 @@
               </a:defRPr>
             </a:lvl2pPr>
             <a:lvl3pPr>
+              <a:buNone/>
               <a:defRPr sz="2550" b="1">
                 <a:solidFill>
                   <a:srgbClr val="172B4D"/>
@@ -7277,6 +7514,7 @@
               </a:defRPr>
             </a:lvl3pPr>
             <a:lvl4pPr>
+              <a:buNone/>
               <a:defRPr sz="2550" b="1">
                 <a:solidFill>
                   <a:srgbClr val="172B4D"/>
@@ -7284,6 +7522,7 @@
               </a:defRPr>
             </a:lvl4pPr>
             <a:lvl5pPr>
+              <a:buNone/>
               <a:defRPr sz="2550" b="1">
                 <a:solidFill>
                   <a:srgbClr val="172B4D"/>
@@ -7291,6 +7530,7 @@
               </a:defRPr>
             </a:lvl5pPr>
             <a:lvl6pPr>
+              <a:buNone/>
               <a:defRPr sz="2550" b="1">
                 <a:solidFill>
                   <a:srgbClr val="172B4D"/>
@@ -7298,6 +7538,7 @@
               </a:defRPr>
             </a:lvl6pPr>
             <a:lvl7pPr>
+              <a:buNone/>
               <a:defRPr sz="2550" b="1">
                 <a:solidFill>
                   <a:srgbClr val="172B4D"/>
@@ -7305,6 +7546,7 @@
               </a:defRPr>
             </a:lvl7pPr>
             <a:lvl8pPr>
+              <a:buNone/>
               <a:defRPr sz="2550" b="1">
                 <a:solidFill>
                   <a:srgbClr val="172B4D"/>
@@ -7312,6 +7554,7 @@
               </a:defRPr>
             </a:lvl8pPr>
             <a:lvl9pPr>
+              <a:buNone/>
               <a:defRPr sz="2550" b="1">
                 <a:solidFill>
                   <a:srgbClr val="172B4D"/>
@@ -7321,6 +7564,7 @@
           </a:lstStyle>
           <a:p xmlns:a="http://schemas.openxmlformats.org/drawingml/2006/main">
             <a:pPr>
+              <a:buNone/>
               <a:defRPr sz="2550" b="1">
                 <a:solidFill>
                   <a:srgbClr val="172B4D"/>
@@ -7333,7 +7577,7 @@
                   <a:srgbClr val="172B4D"/>
                 </a:solidFill>
               </a:rPr>
-              <a:t>Generate and select locator candidates</a:t>
+              <a:t>Capture and review locators in Element Picker</a:t>
             </a:r>
           </a:p>
         </p:txBody>
@@ -7408,6 +7652,7 @@
               </a:defRPr>
             </a:defPPr>
             <a:lvl1pPr>
+              <a:buNone/>
               <a:defRPr sz="825" b="0">
                 <a:solidFill>
                   <a:srgbClr val="5E6F89"/>
@@ -7415,6 +7660,7 @@
               </a:defRPr>
             </a:lvl1pPr>
             <a:lvl2pPr>
+              <a:buNone/>
               <a:defRPr sz="825" b="0">
                 <a:solidFill>
                   <a:srgbClr val="5E6F89"/>
@@ -7422,6 +7668,7 @@
               </a:defRPr>
             </a:lvl2pPr>
             <a:lvl3pPr>
+              <a:buNone/>
               <a:defRPr sz="825" b="0">
                 <a:solidFill>
                   <a:srgbClr val="5E6F89"/>
@@ -7429,6 +7676,7 @@
               </a:defRPr>
             </a:lvl3pPr>
             <a:lvl4pPr>
+              <a:buNone/>
               <a:defRPr sz="825" b="0">
                 <a:solidFill>
                   <a:srgbClr val="5E6F89"/>
@@ -7436,6 +7684,7 @@
               </a:defRPr>
             </a:lvl4pPr>
             <a:lvl5pPr>
+              <a:buNone/>
               <a:defRPr sz="825" b="0">
                 <a:solidFill>
                   <a:srgbClr val="5E6F89"/>
@@ -7443,6 +7692,7 @@
               </a:defRPr>
             </a:lvl5pPr>
             <a:lvl6pPr>
+              <a:buNone/>
               <a:defRPr sz="825" b="0">
                 <a:solidFill>
                   <a:srgbClr val="5E6F89"/>
@@ -7450,6 +7700,7 @@
               </a:defRPr>
             </a:lvl6pPr>
             <a:lvl7pPr>
+              <a:buNone/>
               <a:defRPr sz="825" b="0">
                 <a:solidFill>
                   <a:srgbClr val="5E6F89"/>
@@ -7457,6 +7708,7 @@
               </a:defRPr>
             </a:lvl7pPr>
             <a:lvl8pPr>
+              <a:buNone/>
               <a:defRPr sz="825" b="0">
                 <a:solidFill>
                   <a:srgbClr val="5E6F89"/>
@@ -7464,6 +7716,7 @@
               </a:defRPr>
             </a:lvl8pPr>
             <a:lvl9pPr>
+              <a:buNone/>
               <a:defRPr sz="825" b="0">
                 <a:solidFill>
                   <a:srgbClr val="5E6F89"/>
@@ -7473,6 +7726,7 @@
           </a:lstStyle>
           <a:p xmlns:a="http://schemas.openxmlformats.org/drawingml/2006/main">
             <a:pPr>
+              <a:buNone/>
               <a:defRPr sz="825" b="0">
                 <a:solidFill>
                   <a:srgbClr val="5E6F89"/>
@@ -7495,7 +7749,7 @@
           <p:cNvPr id="6" name="">
             <a:extLst xmlns:a="http://schemas.openxmlformats.org/drawingml/2006/main">
               <a:ext uri="{FF2B5EF4-FFF2-40B4-BE49-F238E27FC236}">
-                <a16:creationId xmlns:a16="http://schemas.microsoft.com/office/drawing/2014/main" id="{A9294872-D1A2-4B0B-B679-99535CEEBFF4}"/>
+                <a16:creationId xmlns:a16="http://schemas.microsoft.com/office/drawing/2014/main" id="{1A8E1FF8-4101-4902-80E1-1F30F12D2B3C}"/>
               </a:ext>
             </a:extLst>
           </p:cNvPr>
@@ -7505,8 +7759,11 @@
           <p:nvPr/>
         </p:nvPicPr>
         <p:blipFill>
-          <a:blip xmlns:r="http://schemas.openxmlformats.org/officeDocument/2006/relationships" xmlns:a="http://schemas.openxmlformats.org/drawingml/2006/main" r:embed="Rca9ac6bf078d43b1"/>
-          <a:stretch xmlns:a="http://schemas.openxmlformats.org/drawingml/2006/main"/>
+          <a:blip xmlns:r="http://schemas.openxmlformats.org/officeDocument/2006/relationships" xmlns:a="http://schemas.openxmlformats.org/drawingml/2006/main" r:embed="Ra2a9e74c65d44602"/>
+          <a:srcRect xmlns:a="http://schemas.openxmlformats.org/drawingml/2006/main" l="6133" t="0" r="6133" b="0"/>
+          <a:stretch xmlns:a="http://schemas.openxmlformats.org/drawingml/2006/main">
+            <a:fillRect l="0" t="0" r="0" b="0"/>
+          </a:stretch>
         </p:blipFill>
         <p:spPr>
           <a:xfrm xmlns:a="http://schemas.openxmlformats.org/drawingml/2006/main">
@@ -7514,9 +7771,7 @@
             <a:ext cx="6858000" cy="4286250"/>
           </a:xfrm>
           <a:prstGeom xmlns:a="http://schemas.openxmlformats.org/drawingml/2006/main" prst="roundRect">
-            <a:avLst>
-              <a:gd name="adj" fmla="val 2667"/>
-            </a:avLst>
+            <a:avLst/>
           </a:prstGeom>
         </p:spPr>
       </p:pic>
@@ -7559,6 +7814,7 @@
               </a:defRPr>
             </a:defPPr>
             <a:lvl1pPr>
+              <a:buNone/>
               <a:defRPr sz="1800" b="1">
                 <a:solidFill>
                   <a:srgbClr val="172B4D"/>
@@ -7566,6 +7822,7 @@
               </a:defRPr>
             </a:lvl1pPr>
             <a:lvl2pPr>
+              <a:buNone/>
               <a:defRPr sz="1800" b="1">
                 <a:solidFill>
                   <a:srgbClr val="172B4D"/>
@@ -7573,6 +7830,7 @@
               </a:defRPr>
             </a:lvl2pPr>
             <a:lvl3pPr>
+              <a:buNone/>
               <a:defRPr sz="1800" b="1">
                 <a:solidFill>
                   <a:srgbClr val="172B4D"/>
@@ -7580,6 +7838,7 @@
               </a:defRPr>
             </a:lvl3pPr>
             <a:lvl4pPr>
+              <a:buNone/>
               <a:defRPr sz="1800" b="1">
                 <a:solidFill>
                   <a:srgbClr val="172B4D"/>
@@ -7587,6 +7846,7 @@
               </a:defRPr>
             </a:lvl4pPr>
             <a:lvl5pPr>
+              <a:buNone/>
               <a:defRPr sz="1800" b="1">
                 <a:solidFill>
                   <a:srgbClr val="172B4D"/>
@@ -7594,6 +7854,7 @@
               </a:defRPr>
             </a:lvl5pPr>
             <a:lvl6pPr>
+              <a:buNone/>
               <a:defRPr sz="1800" b="1">
                 <a:solidFill>
                   <a:srgbClr val="172B4D"/>
@@ -7601,6 +7862,7 @@
               </a:defRPr>
             </a:lvl6pPr>
             <a:lvl7pPr>
+              <a:buNone/>
               <a:defRPr sz="1800" b="1">
                 <a:solidFill>
                   <a:srgbClr val="172B4D"/>
@@ -7608,6 +7870,7 @@
               </a:defRPr>
             </a:lvl7pPr>
             <a:lvl8pPr>
+              <a:buNone/>
               <a:defRPr sz="1800" b="1">
                 <a:solidFill>
                   <a:srgbClr val="172B4D"/>
@@ -7615,6 +7878,7 @@
               </a:defRPr>
             </a:lvl8pPr>
             <a:lvl9pPr>
+              <a:buNone/>
               <a:defRPr sz="1800" b="1">
                 <a:solidFill>
                   <a:srgbClr val="172B4D"/>
@@ -7624,6 +7888,7 @@
           </a:lstStyle>
           <a:p xmlns:a="http://schemas.openxmlformats.org/drawingml/2006/main">
             <a:pPr>
+              <a:buNone/>
               <a:defRPr sz="1800" b="1">
                 <a:solidFill>
                   <a:srgbClr val="172B4D"/>
@@ -7713,6 +7978,7 @@
               </a:defRPr>
             </a:defPPr>
             <a:lvl1pPr>
+              <a:buNone/>
               <a:defRPr sz="1275" b="0">
                 <a:solidFill>
                   <a:srgbClr val="172B4D"/>
@@ -7720,6 +7986,7 @@
               </a:defRPr>
             </a:lvl1pPr>
             <a:lvl2pPr>
+              <a:buNone/>
               <a:defRPr sz="1275" b="0">
                 <a:solidFill>
                   <a:srgbClr val="172B4D"/>
@@ -7727,6 +7994,7 @@
               </a:defRPr>
             </a:lvl2pPr>
             <a:lvl3pPr>
+              <a:buNone/>
               <a:defRPr sz="1275" b="0">
                 <a:solidFill>
                   <a:srgbClr val="172B4D"/>
@@ -7734,6 +8002,7 @@
               </a:defRPr>
             </a:lvl3pPr>
             <a:lvl4pPr>
+              <a:buNone/>
               <a:defRPr sz="1275" b="0">
                 <a:solidFill>
                   <a:srgbClr val="172B4D"/>
@@ -7741,6 +8010,7 @@
               </a:defRPr>
             </a:lvl4pPr>
             <a:lvl5pPr>
+              <a:buNone/>
               <a:defRPr sz="1275" b="0">
                 <a:solidFill>
                   <a:srgbClr val="172B4D"/>
@@ -7748,6 +8018,7 @@
               </a:defRPr>
             </a:lvl5pPr>
             <a:lvl6pPr>
+              <a:buNone/>
               <a:defRPr sz="1275" b="0">
                 <a:solidFill>
                   <a:srgbClr val="172B4D"/>
@@ -7755,6 +8026,7 @@
               </a:defRPr>
             </a:lvl6pPr>
             <a:lvl7pPr>
+              <a:buNone/>
               <a:defRPr sz="1275" b="0">
                 <a:solidFill>
                   <a:srgbClr val="172B4D"/>
@@ -7762,6 +8034,7 @@
               </a:defRPr>
             </a:lvl7pPr>
             <a:lvl8pPr>
+              <a:buNone/>
               <a:defRPr sz="1275" b="0">
                 <a:solidFill>
                   <a:srgbClr val="172B4D"/>
@@ -7769,6 +8042,7 @@
               </a:defRPr>
             </a:lvl8pPr>
             <a:lvl9pPr>
+              <a:buNone/>
               <a:defRPr sz="1275" b="0">
                 <a:solidFill>
                   <a:srgbClr val="172B4D"/>
@@ -7778,6 +8052,7 @@
           </a:lstStyle>
           <a:p xmlns:a="http://schemas.openxmlformats.org/drawingml/2006/main">
             <a:pPr>
+              <a:buNone/>
               <a:defRPr sz="1275" b="0">
                 <a:solidFill>
                   <a:srgbClr val="172B4D"/>
@@ -7867,6 +8142,7 @@
               </a:defRPr>
             </a:defPPr>
             <a:lvl1pPr>
+              <a:buNone/>
               <a:defRPr sz="1275" b="0">
                 <a:solidFill>
                   <a:srgbClr val="172B4D"/>
@@ -7874,6 +8150,7 @@
               </a:defRPr>
             </a:lvl1pPr>
             <a:lvl2pPr>
+              <a:buNone/>
               <a:defRPr sz="1275" b="0">
                 <a:solidFill>
                   <a:srgbClr val="172B4D"/>
@@ -7881,6 +8158,7 @@
               </a:defRPr>
             </a:lvl2pPr>
             <a:lvl3pPr>
+              <a:buNone/>
               <a:defRPr sz="1275" b="0">
                 <a:solidFill>
                   <a:srgbClr val="172B4D"/>
@@ -7888,6 +8166,7 @@
               </a:defRPr>
             </a:lvl3pPr>
             <a:lvl4pPr>
+              <a:buNone/>
               <a:defRPr sz="1275" b="0">
                 <a:solidFill>
                   <a:srgbClr val="172B4D"/>
@@ -7895,6 +8174,7 @@
               </a:defRPr>
             </a:lvl4pPr>
             <a:lvl5pPr>
+              <a:buNone/>
               <a:defRPr sz="1275" b="0">
                 <a:solidFill>
                   <a:srgbClr val="172B4D"/>
@@ -7902,6 +8182,7 @@
               </a:defRPr>
             </a:lvl5pPr>
             <a:lvl6pPr>
+              <a:buNone/>
               <a:defRPr sz="1275" b="0">
                 <a:solidFill>
                   <a:srgbClr val="172B4D"/>
@@ -7909,6 +8190,7 @@
               </a:defRPr>
             </a:lvl6pPr>
             <a:lvl7pPr>
+              <a:buNone/>
               <a:defRPr sz="1275" b="0">
                 <a:solidFill>
                   <a:srgbClr val="172B4D"/>
@@ -7916,6 +8198,7 @@
               </a:defRPr>
             </a:lvl7pPr>
             <a:lvl8pPr>
+              <a:buNone/>
               <a:defRPr sz="1275" b="0">
                 <a:solidFill>
                   <a:srgbClr val="172B4D"/>
@@ -7923,6 +8206,7 @@
               </a:defRPr>
             </a:lvl8pPr>
             <a:lvl9pPr>
+              <a:buNone/>
               <a:defRPr sz="1275" b="0">
                 <a:solidFill>
                   <a:srgbClr val="172B4D"/>
@@ -7932,6 +8216,7 @@
           </a:lstStyle>
           <a:p xmlns:a="http://schemas.openxmlformats.org/drawingml/2006/main">
             <a:pPr>
+              <a:buNone/>
               <a:defRPr sz="1275" b="0">
                 <a:solidFill>
                   <a:srgbClr val="172B4D"/>
@@ -7944,7 +8229,7 @@
                   <a:srgbClr val="172B4D"/>
                 </a:solidFill>
               </a:rPr>
-              <a:t>Check the locators you want, or use Select all generated selectors.</a:t>
+              <a:t>Choose individual candidates or select all generated locators.</a:t>
             </a:r>
           </a:p>
         </p:txBody>
@@ -8021,6 +8306,7 @@
               </a:defRPr>
             </a:defPPr>
             <a:lvl1pPr>
+              <a:buNone/>
               <a:defRPr sz="1275" b="0">
                 <a:solidFill>
                   <a:srgbClr val="172B4D"/>
@@ -8028,6 +8314,7 @@
               </a:defRPr>
             </a:lvl1pPr>
             <a:lvl2pPr>
+              <a:buNone/>
               <a:defRPr sz="1275" b="0">
                 <a:solidFill>
                   <a:srgbClr val="172B4D"/>
@@ -8035,6 +8322,7 @@
               </a:defRPr>
             </a:lvl2pPr>
             <a:lvl3pPr>
+              <a:buNone/>
               <a:defRPr sz="1275" b="0">
                 <a:solidFill>
                   <a:srgbClr val="172B4D"/>
@@ -8042,6 +8330,7 @@
               </a:defRPr>
             </a:lvl3pPr>
             <a:lvl4pPr>
+              <a:buNone/>
               <a:defRPr sz="1275" b="0">
                 <a:solidFill>
                   <a:srgbClr val="172B4D"/>
@@ -8049,6 +8338,7 @@
               </a:defRPr>
             </a:lvl4pPr>
             <a:lvl5pPr>
+              <a:buNone/>
               <a:defRPr sz="1275" b="0">
                 <a:solidFill>
                   <a:srgbClr val="172B4D"/>
@@ -8056,6 +8346,7 @@
               </a:defRPr>
             </a:lvl5pPr>
             <a:lvl6pPr>
+              <a:buNone/>
               <a:defRPr sz="1275" b="0">
                 <a:solidFill>
                   <a:srgbClr val="172B4D"/>
@@ -8063,6 +8354,7 @@
               </a:defRPr>
             </a:lvl6pPr>
             <a:lvl7pPr>
+              <a:buNone/>
               <a:defRPr sz="1275" b="0">
                 <a:solidFill>
                   <a:srgbClr val="172B4D"/>
@@ -8070,6 +8362,7 @@
               </a:defRPr>
             </a:lvl7pPr>
             <a:lvl8pPr>
+              <a:buNone/>
               <a:defRPr sz="1275" b="0">
                 <a:solidFill>
                   <a:srgbClr val="172B4D"/>
@@ -8077,6 +8370,7 @@
               </a:defRPr>
             </a:lvl8pPr>
             <a:lvl9pPr>
+              <a:buNone/>
               <a:defRPr sz="1275" b="0">
                 <a:solidFill>
                   <a:srgbClr val="172B4D"/>
@@ -8086,6 +8380,7 @@
           </a:lstStyle>
           <a:p xmlns:a="http://schemas.openxmlformats.org/drawingml/2006/main">
             <a:pPr>
+              <a:buNone/>
               <a:defRPr sz="1275" b="0">
                 <a:solidFill>
                   <a:srgbClr val="172B4D"/>
@@ -8098,7 +8393,7 @@
                   <a:srgbClr val="172B4D"/>
                 </a:solidFill>
               </a:rPr>
-              <a:t>Preview framework bindings from the framework dropdown.</a:t>
+              <a:t>Preview framework bindings and exclude unwanted locator patterns.</a:t>
             </a:r>
           </a:p>
         </p:txBody>
@@ -8175,6 +8470,7 @@
               </a:defRPr>
             </a:defPPr>
             <a:lvl1pPr>
+              <a:buNone/>
               <a:defRPr sz="1275" b="0">
                 <a:solidFill>
                   <a:srgbClr val="172B4D"/>
@@ -8182,6 +8478,7 @@
               </a:defRPr>
             </a:lvl1pPr>
             <a:lvl2pPr>
+              <a:buNone/>
               <a:defRPr sz="1275" b="0">
                 <a:solidFill>
                   <a:srgbClr val="172B4D"/>
@@ -8189,6 +8486,7 @@
               </a:defRPr>
             </a:lvl2pPr>
             <a:lvl3pPr>
+              <a:buNone/>
               <a:defRPr sz="1275" b="0">
                 <a:solidFill>
                   <a:srgbClr val="172B4D"/>
@@ -8196,6 +8494,7 @@
               </a:defRPr>
             </a:lvl3pPr>
             <a:lvl4pPr>
+              <a:buNone/>
               <a:defRPr sz="1275" b="0">
                 <a:solidFill>
                   <a:srgbClr val="172B4D"/>
@@ -8203,6 +8502,7 @@
               </a:defRPr>
             </a:lvl4pPr>
             <a:lvl5pPr>
+              <a:buNone/>
               <a:defRPr sz="1275" b="0">
                 <a:solidFill>
                   <a:srgbClr val="172B4D"/>
@@ -8210,6 +8510,7 @@
               </a:defRPr>
             </a:lvl5pPr>
             <a:lvl6pPr>
+              <a:buNone/>
               <a:defRPr sz="1275" b="0">
                 <a:solidFill>
                   <a:srgbClr val="172B4D"/>
@@ -8217,6 +8518,7 @@
               </a:defRPr>
             </a:lvl6pPr>
             <a:lvl7pPr>
+              <a:buNone/>
               <a:defRPr sz="1275" b="0">
                 <a:solidFill>
                   <a:srgbClr val="172B4D"/>
@@ -8224,6 +8526,7 @@
               </a:defRPr>
             </a:lvl7pPr>
             <a:lvl8pPr>
+              <a:buNone/>
               <a:defRPr sz="1275" b="0">
                 <a:solidFill>
                   <a:srgbClr val="172B4D"/>
@@ -8231,6 +8534,7 @@
               </a:defRPr>
             </a:lvl8pPr>
             <a:lvl9pPr>
+              <a:buNone/>
               <a:defRPr sz="1275" b="0">
                 <a:solidFill>
                   <a:srgbClr val="172B4D"/>
@@ -8240,6 +8544,7 @@
           </a:lstStyle>
           <a:p xmlns:a="http://schemas.openxmlformats.org/drawingml/2006/main">
             <a:pPr>
+              <a:buNone/>
               <a:defRPr sz="1275" b="0">
                 <a:solidFill>
                   <a:srgbClr val="172B4D"/>
@@ -8252,7 +8557,7 @@
                   <a:srgbClr val="172B4D"/>
                 </a:solidFill>
               </a:rPr>
-              <a:t>Send selected locators to Page Objects or export them.</a:t>
+              <a:t>Copy, test, audit, add to Page Objects, or export selected locators.</a:t>
             </a:r>
           </a:p>
         </p:txBody>
@@ -8356,6 +8661,7 @@
               </a:defRPr>
             </a:defPPr>
             <a:lvl1pPr>
+              <a:buNone/>
               <a:defRPr sz="975" b="1">
                 <a:solidFill>
                   <a:srgbClr val="2563EB"/>
@@ -8363,6 +8669,7 @@
               </a:defRPr>
             </a:lvl1pPr>
             <a:lvl2pPr>
+              <a:buNone/>
               <a:defRPr sz="975" b="1">
                 <a:solidFill>
                   <a:srgbClr val="2563EB"/>
@@ -8370,6 +8677,7 @@
               </a:defRPr>
             </a:lvl2pPr>
             <a:lvl3pPr>
+              <a:buNone/>
               <a:defRPr sz="975" b="1">
                 <a:solidFill>
                   <a:srgbClr val="2563EB"/>
@@ -8377,6 +8685,7 @@
               </a:defRPr>
             </a:lvl3pPr>
             <a:lvl4pPr>
+              <a:buNone/>
               <a:defRPr sz="975" b="1">
                 <a:solidFill>
                   <a:srgbClr val="2563EB"/>
@@ -8384,6 +8693,7 @@
               </a:defRPr>
             </a:lvl4pPr>
             <a:lvl5pPr>
+              <a:buNone/>
               <a:defRPr sz="975" b="1">
                 <a:solidFill>
                   <a:srgbClr val="2563EB"/>
@@ -8391,6 +8701,7 @@
               </a:defRPr>
             </a:lvl5pPr>
             <a:lvl6pPr>
+              <a:buNone/>
               <a:defRPr sz="975" b="1">
                 <a:solidFill>
                   <a:srgbClr val="2563EB"/>
@@ -8398,6 +8709,7 @@
               </a:defRPr>
             </a:lvl6pPr>
             <a:lvl7pPr>
+              <a:buNone/>
               <a:defRPr sz="975" b="1">
                 <a:solidFill>
                   <a:srgbClr val="2563EB"/>
@@ -8405,6 +8717,7 @@
               </a:defRPr>
             </a:lvl7pPr>
             <a:lvl8pPr>
+              <a:buNone/>
               <a:defRPr sz="975" b="1">
                 <a:solidFill>
                   <a:srgbClr val="2563EB"/>
@@ -8412,6 +8725,7 @@
               </a:defRPr>
             </a:lvl8pPr>
             <a:lvl9pPr>
+              <a:buNone/>
               <a:defRPr sz="975" b="1">
                 <a:solidFill>
                   <a:srgbClr val="2563EB"/>
@@ -8421,6 +8735,7 @@
           </a:lstStyle>
           <a:p xmlns:a="http://schemas.openxmlformats.org/drawingml/2006/main">
             <a:pPr>
+              <a:buNone/>
               <a:defRPr sz="975" b="1">
                 <a:solidFill>
                   <a:srgbClr val="2563EB"/>
@@ -8477,6 +8792,7 @@
               </a:defRPr>
             </a:defPPr>
             <a:lvl1pPr>
+              <a:buNone/>
               <a:defRPr sz="2550" b="1">
                 <a:solidFill>
                   <a:srgbClr val="172B4D"/>
@@ -8484,6 +8800,7 @@
               </a:defRPr>
             </a:lvl1pPr>
             <a:lvl2pPr>
+              <a:buNone/>
               <a:defRPr sz="2550" b="1">
                 <a:solidFill>
                   <a:srgbClr val="172B4D"/>
@@ -8491,6 +8808,7 @@
               </a:defRPr>
             </a:lvl2pPr>
             <a:lvl3pPr>
+              <a:buNone/>
               <a:defRPr sz="2550" b="1">
                 <a:solidFill>
                   <a:srgbClr val="172B4D"/>
@@ -8498,6 +8816,7 @@
               </a:defRPr>
             </a:lvl3pPr>
             <a:lvl4pPr>
+              <a:buNone/>
               <a:defRPr sz="2550" b="1">
                 <a:solidFill>
                   <a:srgbClr val="172B4D"/>
@@ -8505,6 +8824,7 @@
               </a:defRPr>
             </a:lvl4pPr>
             <a:lvl5pPr>
+              <a:buNone/>
               <a:defRPr sz="2550" b="1">
                 <a:solidFill>
                   <a:srgbClr val="172B4D"/>
@@ -8512,6 +8832,7 @@
               </a:defRPr>
             </a:lvl5pPr>
             <a:lvl6pPr>
+              <a:buNone/>
               <a:defRPr sz="2550" b="1">
                 <a:solidFill>
                   <a:srgbClr val="172B4D"/>
@@ -8519,6 +8840,7 @@
               </a:defRPr>
             </a:lvl6pPr>
             <a:lvl7pPr>
+              <a:buNone/>
               <a:defRPr sz="2550" b="1">
                 <a:solidFill>
                   <a:srgbClr val="172B4D"/>
@@ -8526,6 +8848,7 @@
               </a:defRPr>
             </a:lvl7pPr>
             <a:lvl8pPr>
+              <a:buNone/>
               <a:defRPr sz="2550" b="1">
                 <a:solidFill>
                   <a:srgbClr val="172B4D"/>
@@ -8533,6 +8856,7 @@
               </a:defRPr>
             </a:lvl8pPr>
             <a:lvl9pPr>
+              <a:buNone/>
               <a:defRPr sz="2550" b="1">
                 <a:solidFill>
                   <a:srgbClr val="172B4D"/>
@@ -8542,6 +8866,7 @@
           </a:lstStyle>
           <a:p xmlns:a="http://schemas.openxmlformats.org/drawingml/2006/main">
             <a:pPr>
+              <a:buNone/>
               <a:defRPr sz="2550" b="1">
                 <a:solidFill>
                   <a:srgbClr val="172B4D"/>
@@ -8629,6 +8954,7 @@
               </a:defRPr>
             </a:defPPr>
             <a:lvl1pPr>
+              <a:buNone/>
               <a:defRPr sz="825" b="0">
                 <a:solidFill>
                   <a:srgbClr val="5E6F89"/>
@@ -8636,6 +8962,7 @@
               </a:defRPr>
             </a:lvl1pPr>
             <a:lvl2pPr>
+              <a:buNone/>
               <a:defRPr sz="825" b="0">
                 <a:solidFill>
                   <a:srgbClr val="5E6F89"/>
@@ -8643,6 +8970,7 @@
               </a:defRPr>
             </a:lvl2pPr>
             <a:lvl3pPr>
+              <a:buNone/>
               <a:defRPr sz="825" b="0">
                 <a:solidFill>
                   <a:srgbClr val="5E6F89"/>
@@ -8650,6 +8978,7 @@
               </a:defRPr>
             </a:lvl3pPr>
             <a:lvl4pPr>
+              <a:buNone/>
               <a:defRPr sz="825" b="0">
                 <a:solidFill>
                   <a:srgbClr val="5E6F89"/>
@@ -8657,6 +8986,7 @@
               </a:defRPr>
             </a:lvl4pPr>
             <a:lvl5pPr>
+              <a:buNone/>
               <a:defRPr sz="825" b="0">
                 <a:solidFill>
                   <a:srgbClr val="5E6F89"/>
@@ -8664,6 +8994,7 @@
               </a:defRPr>
             </a:lvl5pPr>
             <a:lvl6pPr>
+              <a:buNone/>
               <a:defRPr sz="825" b="0">
                 <a:solidFill>
                   <a:srgbClr val="5E6F89"/>
@@ -8671,6 +9002,7 @@
               </a:defRPr>
             </a:lvl6pPr>
             <a:lvl7pPr>
+              <a:buNone/>
               <a:defRPr sz="825" b="0">
                 <a:solidFill>
                   <a:srgbClr val="5E6F89"/>
@@ -8678,6 +9010,7 @@
               </a:defRPr>
             </a:lvl7pPr>
             <a:lvl8pPr>
+              <a:buNone/>
               <a:defRPr sz="825" b="0">
                 <a:solidFill>
                   <a:srgbClr val="5E6F89"/>
@@ -8685,6 +9018,7 @@
               </a:defRPr>
             </a:lvl8pPr>
             <a:lvl9pPr>
+              <a:buNone/>
               <a:defRPr sz="825" b="0">
                 <a:solidFill>
                   <a:srgbClr val="5E6F89"/>
@@ -8694,6 +9028,7 @@
           </a:lstStyle>
           <a:p xmlns:a="http://schemas.openxmlformats.org/drawingml/2006/main">
             <a:pPr>
+              <a:buNone/>
               <a:defRPr sz="825" b="0">
                 <a:solidFill>
                   <a:srgbClr val="5E6F89"/>
@@ -8716,7 +9051,7 @@
           <p:cNvPr id="6" name="">
             <a:extLst xmlns:a="http://schemas.openxmlformats.org/drawingml/2006/main">
               <a:ext uri="{FF2B5EF4-FFF2-40B4-BE49-F238E27FC236}">
-                <a16:creationId xmlns:a16="http://schemas.microsoft.com/office/drawing/2014/main" id="{96D85E2D-3FF2-4B0A-BC24-6F4F24DB0944}"/>
+                <a16:creationId xmlns:a16="http://schemas.microsoft.com/office/drawing/2014/main" id="{45110868-11F2-4C12-8626-670A18D215C6}"/>
               </a:ext>
             </a:extLst>
           </p:cNvPr>
@@ -8726,8 +9061,11 @@
           <p:nvPr/>
         </p:nvPicPr>
         <p:blipFill>
-          <a:blip xmlns:r="http://schemas.openxmlformats.org/officeDocument/2006/relationships" xmlns:a="http://schemas.openxmlformats.org/drawingml/2006/main" r:embed="Rcb7b55827b4f4cff"/>
-          <a:stretch xmlns:a="http://schemas.openxmlformats.org/drawingml/2006/main"/>
+          <a:blip xmlns:r="http://schemas.openxmlformats.org/officeDocument/2006/relationships" xmlns:a="http://schemas.openxmlformats.org/drawingml/2006/main" r:embed="Rb0dc54ad1c76457f"/>
+          <a:srcRect xmlns:a="http://schemas.openxmlformats.org/drawingml/2006/main" l="6133" t="0" r="6133" b="0"/>
+          <a:stretch xmlns:a="http://schemas.openxmlformats.org/drawingml/2006/main">
+            <a:fillRect l="0" t="0" r="0" b="0"/>
+          </a:stretch>
         </p:blipFill>
         <p:spPr>
           <a:xfrm xmlns:a="http://schemas.openxmlformats.org/drawingml/2006/main">
@@ -8735,9 +9073,7 @@
             <a:ext cx="6858000" cy="4286250"/>
           </a:xfrm>
           <a:prstGeom xmlns:a="http://schemas.openxmlformats.org/drawingml/2006/main" prst="roundRect">
-            <a:avLst>
-              <a:gd name="adj" fmla="val 2667"/>
-            </a:avLst>
+            <a:avLst/>
           </a:prstGeom>
         </p:spPr>
       </p:pic>
@@ -8780,6 +9116,7 @@
               </a:defRPr>
             </a:defPPr>
             <a:lvl1pPr>
+              <a:buNone/>
               <a:defRPr sz="1800" b="1">
                 <a:solidFill>
                   <a:srgbClr val="172B4D"/>
@@ -8787,6 +9124,7 @@
               </a:defRPr>
             </a:lvl1pPr>
             <a:lvl2pPr>
+              <a:buNone/>
               <a:defRPr sz="1800" b="1">
                 <a:solidFill>
                   <a:srgbClr val="172B4D"/>
@@ -8794,6 +9132,7 @@
               </a:defRPr>
             </a:lvl2pPr>
             <a:lvl3pPr>
+              <a:buNone/>
               <a:defRPr sz="1800" b="1">
                 <a:solidFill>
                   <a:srgbClr val="172B4D"/>
@@ -8801,6 +9140,7 @@
               </a:defRPr>
             </a:lvl3pPr>
             <a:lvl4pPr>
+              <a:buNone/>
               <a:defRPr sz="1800" b="1">
                 <a:solidFill>
                   <a:srgbClr val="172B4D"/>
@@ -8808,6 +9148,7 @@
               </a:defRPr>
             </a:lvl4pPr>
             <a:lvl5pPr>
+              <a:buNone/>
               <a:defRPr sz="1800" b="1">
                 <a:solidFill>
                   <a:srgbClr val="172B4D"/>
@@ -8815,6 +9156,7 @@
               </a:defRPr>
             </a:lvl5pPr>
             <a:lvl6pPr>
+              <a:buNone/>
               <a:defRPr sz="1800" b="1">
                 <a:solidFill>
                   <a:srgbClr val="172B4D"/>
@@ -8822,6 +9164,7 @@
               </a:defRPr>
             </a:lvl6pPr>
             <a:lvl7pPr>
+              <a:buNone/>
               <a:defRPr sz="1800" b="1">
                 <a:solidFill>
                   <a:srgbClr val="172B4D"/>
@@ -8829,6 +9172,7 @@
               </a:defRPr>
             </a:lvl7pPr>
             <a:lvl8pPr>
+              <a:buNone/>
               <a:defRPr sz="1800" b="1">
                 <a:solidFill>
                   <a:srgbClr val="172B4D"/>
@@ -8836,6 +9180,7 @@
               </a:defRPr>
             </a:lvl8pPr>
             <a:lvl9pPr>
+              <a:buNone/>
               <a:defRPr sz="1800" b="1">
                 <a:solidFill>
                   <a:srgbClr val="172B4D"/>
@@ -8845,6 +9190,7 @@
           </a:lstStyle>
           <a:p xmlns:a="http://schemas.openxmlformats.org/drawingml/2006/main">
             <a:pPr>
+              <a:buNone/>
               <a:defRPr sz="1800" b="1">
                 <a:solidFill>
                   <a:srgbClr val="172B4D"/>
@@ -8934,6 +9280,7 @@
               </a:defRPr>
             </a:defPPr>
             <a:lvl1pPr>
+              <a:buNone/>
               <a:defRPr sz="1350" b="0">
                 <a:solidFill>
                   <a:srgbClr val="172B4D"/>
@@ -8941,6 +9288,7 @@
               </a:defRPr>
             </a:lvl1pPr>
             <a:lvl2pPr>
+              <a:buNone/>
               <a:defRPr sz="1350" b="0">
                 <a:solidFill>
                   <a:srgbClr val="172B4D"/>
@@ -8948,6 +9296,7 @@
               </a:defRPr>
             </a:lvl2pPr>
             <a:lvl3pPr>
+              <a:buNone/>
               <a:defRPr sz="1350" b="0">
                 <a:solidFill>
                   <a:srgbClr val="172B4D"/>
@@ -8955,6 +9304,7 @@
               </a:defRPr>
             </a:lvl3pPr>
             <a:lvl4pPr>
+              <a:buNone/>
               <a:defRPr sz="1350" b="0">
                 <a:solidFill>
                   <a:srgbClr val="172B4D"/>
@@ -8962,6 +9312,7 @@
               </a:defRPr>
             </a:lvl4pPr>
             <a:lvl5pPr>
+              <a:buNone/>
               <a:defRPr sz="1350" b="0">
                 <a:solidFill>
                   <a:srgbClr val="172B4D"/>
@@ -8969,6 +9320,7 @@
               </a:defRPr>
             </a:lvl5pPr>
             <a:lvl6pPr>
+              <a:buNone/>
               <a:defRPr sz="1350" b="0">
                 <a:solidFill>
                   <a:srgbClr val="172B4D"/>
@@ -8976,6 +9328,7 @@
               </a:defRPr>
             </a:lvl6pPr>
             <a:lvl7pPr>
+              <a:buNone/>
               <a:defRPr sz="1350" b="0">
                 <a:solidFill>
                   <a:srgbClr val="172B4D"/>
@@ -8983,6 +9336,7 @@
               </a:defRPr>
             </a:lvl7pPr>
             <a:lvl8pPr>
+              <a:buNone/>
               <a:defRPr sz="1350" b="0">
                 <a:solidFill>
                   <a:srgbClr val="172B4D"/>
@@ -8990,6 +9344,7 @@
               </a:defRPr>
             </a:lvl8pPr>
             <a:lvl9pPr>
+              <a:buNone/>
               <a:defRPr sz="1350" b="0">
                 <a:solidFill>
                   <a:srgbClr val="172B4D"/>
@@ -8999,6 +9354,7 @@
           </a:lstStyle>
           <a:p xmlns:a="http://schemas.openxmlformats.org/drawingml/2006/main">
             <a:pPr>
+              <a:buNone/>
               <a:defRPr sz="1350" b="0">
                 <a:solidFill>
                   <a:srgbClr val="172B4D"/>
@@ -9088,6 +9444,7 @@
               </a:defRPr>
             </a:defPPr>
             <a:lvl1pPr>
+              <a:buNone/>
               <a:defRPr sz="1350" b="0">
                 <a:solidFill>
                   <a:srgbClr val="172B4D"/>
@@ -9095,6 +9452,7 @@
               </a:defRPr>
             </a:lvl1pPr>
             <a:lvl2pPr>
+              <a:buNone/>
               <a:defRPr sz="1350" b="0">
                 <a:solidFill>
                   <a:srgbClr val="172B4D"/>
@@ -9102,6 +9460,7 @@
               </a:defRPr>
             </a:lvl2pPr>
             <a:lvl3pPr>
+              <a:buNone/>
               <a:defRPr sz="1350" b="0">
                 <a:solidFill>
                   <a:srgbClr val="172B4D"/>
@@ -9109,6 +9468,7 @@
               </a:defRPr>
             </a:lvl3pPr>
             <a:lvl4pPr>
+              <a:buNone/>
               <a:defRPr sz="1350" b="0">
                 <a:solidFill>
                   <a:srgbClr val="172B4D"/>
@@ -9116,6 +9476,7 @@
               </a:defRPr>
             </a:lvl4pPr>
             <a:lvl5pPr>
+              <a:buNone/>
               <a:defRPr sz="1350" b="0">
                 <a:solidFill>
                   <a:srgbClr val="172B4D"/>
@@ -9123,6 +9484,7 @@
               </a:defRPr>
             </a:lvl5pPr>
             <a:lvl6pPr>
+              <a:buNone/>
               <a:defRPr sz="1350" b="0">
                 <a:solidFill>
                   <a:srgbClr val="172B4D"/>
@@ -9130,6 +9492,7 @@
               </a:defRPr>
             </a:lvl6pPr>
             <a:lvl7pPr>
+              <a:buNone/>
               <a:defRPr sz="1350" b="0">
                 <a:solidFill>
                   <a:srgbClr val="172B4D"/>
@@ -9137,6 +9500,7 @@
               </a:defRPr>
             </a:lvl7pPr>
             <a:lvl8pPr>
+              <a:buNone/>
               <a:defRPr sz="1350" b="0">
                 <a:solidFill>
                   <a:srgbClr val="172B4D"/>
@@ -9144,6 +9508,7 @@
               </a:defRPr>
             </a:lvl8pPr>
             <a:lvl9pPr>
+              <a:buNone/>
               <a:defRPr sz="1350" b="0">
                 <a:solidFill>
                   <a:srgbClr val="172B4D"/>
@@ -9153,6 +9518,7 @@
           </a:lstStyle>
           <a:p xmlns:a="http://schemas.openxmlformats.org/drawingml/2006/main">
             <a:pPr>
+              <a:buNone/>
               <a:defRPr sz="1350" b="0">
                 <a:solidFill>
                   <a:srgbClr val="172B4D"/>
@@ -9242,6 +9608,7 @@
               </a:defRPr>
             </a:defPPr>
             <a:lvl1pPr>
+              <a:buNone/>
               <a:defRPr sz="1350" b="0">
                 <a:solidFill>
                   <a:srgbClr val="172B4D"/>
@@ -9249,6 +9616,7 @@
               </a:defRPr>
             </a:lvl1pPr>
             <a:lvl2pPr>
+              <a:buNone/>
               <a:defRPr sz="1350" b="0">
                 <a:solidFill>
                   <a:srgbClr val="172B4D"/>
@@ -9256,6 +9624,7 @@
               </a:defRPr>
             </a:lvl2pPr>
             <a:lvl3pPr>
+              <a:buNone/>
               <a:defRPr sz="1350" b="0">
                 <a:solidFill>
                   <a:srgbClr val="172B4D"/>
@@ -9263,6 +9632,7 @@
               </a:defRPr>
             </a:lvl3pPr>
             <a:lvl4pPr>
+              <a:buNone/>
               <a:defRPr sz="1350" b="0">
                 <a:solidFill>
                   <a:srgbClr val="172B4D"/>
@@ -9270,6 +9640,7 @@
               </a:defRPr>
             </a:lvl4pPr>
             <a:lvl5pPr>
+              <a:buNone/>
               <a:defRPr sz="1350" b="0">
                 <a:solidFill>
                   <a:srgbClr val="172B4D"/>
@@ -9277,6 +9648,7 @@
               </a:defRPr>
             </a:lvl5pPr>
             <a:lvl6pPr>
+              <a:buNone/>
               <a:defRPr sz="1350" b="0">
                 <a:solidFill>
                   <a:srgbClr val="172B4D"/>
@@ -9284,6 +9656,7 @@
               </a:defRPr>
             </a:lvl6pPr>
             <a:lvl7pPr>
+              <a:buNone/>
               <a:defRPr sz="1350" b="0">
                 <a:solidFill>
                   <a:srgbClr val="172B4D"/>
@@ -9291,6 +9664,7 @@
               </a:defRPr>
             </a:lvl7pPr>
             <a:lvl8pPr>
+              <a:buNone/>
               <a:defRPr sz="1350" b="0">
                 <a:solidFill>
                   <a:srgbClr val="172B4D"/>
@@ -9298,6 +9672,7 @@
               </a:defRPr>
             </a:lvl8pPr>
             <a:lvl9pPr>
+              <a:buNone/>
               <a:defRPr sz="1350" b="0">
                 <a:solidFill>
                   <a:srgbClr val="172B4D"/>
@@ -9307,6 +9682,7 @@
           </a:lstStyle>
           <a:p xmlns:a="http://schemas.openxmlformats.org/drawingml/2006/main">
             <a:pPr>
+              <a:buNone/>
               <a:defRPr sz="1350" b="0">
                 <a:solidFill>
                   <a:srgbClr val="172B4D"/>
@@ -9396,6 +9772,7 @@
               </a:defRPr>
             </a:defPPr>
             <a:lvl1pPr>
+              <a:buNone/>
               <a:defRPr sz="1350" b="0">
                 <a:solidFill>
                   <a:srgbClr val="172B4D"/>
@@ -9403,6 +9780,7 @@
               </a:defRPr>
             </a:lvl1pPr>
             <a:lvl2pPr>
+              <a:buNone/>
               <a:defRPr sz="1350" b="0">
                 <a:solidFill>
                   <a:srgbClr val="172B4D"/>
@@ -9410,6 +9788,7 @@
               </a:defRPr>
             </a:lvl2pPr>
             <a:lvl3pPr>
+              <a:buNone/>
               <a:defRPr sz="1350" b="0">
                 <a:solidFill>
                   <a:srgbClr val="172B4D"/>
@@ -9417,6 +9796,7 @@
               </a:defRPr>
             </a:lvl3pPr>
             <a:lvl4pPr>
+              <a:buNone/>
               <a:defRPr sz="1350" b="0">
                 <a:solidFill>
                   <a:srgbClr val="172B4D"/>
@@ -9424,6 +9804,7 @@
               </a:defRPr>
             </a:lvl4pPr>
             <a:lvl5pPr>
+              <a:buNone/>
               <a:defRPr sz="1350" b="0">
                 <a:solidFill>
                   <a:srgbClr val="172B4D"/>
@@ -9431,6 +9812,7 @@
               </a:defRPr>
             </a:lvl5pPr>
             <a:lvl6pPr>
+              <a:buNone/>
               <a:defRPr sz="1350" b="0">
                 <a:solidFill>
                   <a:srgbClr val="172B4D"/>
@@ -9438,6 +9820,7 @@
               </a:defRPr>
             </a:lvl6pPr>
             <a:lvl7pPr>
+              <a:buNone/>
               <a:defRPr sz="1350" b="0">
                 <a:solidFill>
                   <a:srgbClr val="172B4D"/>
@@ -9445,6 +9828,7 @@
               </a:defRPr>
             </a:lvl7pPr>
             <a:lvl8pPr>
+              <a:buNone/>
               <a:defRPr sz="1350" b="0">
                 <a:solidFill>
                   <a:srgbClr val="172B4D"/>
@@ -9452,6 +9836,7 @@
               </a:defRPr>
             </a:lvl8pPr>
             <a:lvl9pPr>
+              <a:buNone/>
               <a:defRPr sz="1350" b="0">
                 <a:solidFill>
                   <a:srgbClr val="172B4D"/>
@@ -9461,6 +9846,7 @@
           </a:lstStyle>
           <a:p xmlns:a="http://schemas.openxmlformats.org/drawingml/2006/main">
             <a:pPr>
+              <a:buNone/>
               <a:defRPr sz="1350" b="0">
                 <a:solidFill>
                   <a:srgbClr val="172B4D"/>
@@ -9473,7 +9859,7 @@
                   <a:srgbClr val="172B4D"/>
                 </a:solidFill>
               </a:rPr>
-              <a:t>Live element picking is available when Selenium is configured.</a:t>
+              <a:t>Use the embedded picker to capture elements; Selenium supports live browser workflows.</a:t>
             </a:r>
           </a:p>
         </p:txBody>
@@ -9577,6 +9963,7 @@
               </a:defRPr>
             </a:defPPr>
             <a:lvl1pPr>
+              <a:buNone/>
               <a:defRPr sz="975" b="1">
                 <a:solidFill>
                   <a:srgbClr val="2563EB"/>
@@ -9584,6 +9971,7 @@
               </a:defRPr>
             </a:lvl1pPr>
             <a:lvl2pPr>
+              <a:buNone/>
               <a:defRPr sz="975" b="1">
                 <a:solidFill>
                   <a:srgbClr val="2563EB"/>
@@ -9591,6 +9979,7 @@
               </a:defRPr>
             </a:lvl2pPr>
             <a:lvl3pPr>
+              <a:buNone/>
               <a:defRPr sz="975" b="1">
                 <a:solidFill>
                   <a:srgbClr val="2563EB"/>
@@ -9598,6 +9987,7 @@
               </a:defRPr>
             </a:lvl3pPr>
             <a:lvl4pPr>
+              <a:buNone/>
               <a:defRPr sz="975" b="1">
                 <a:solidFill>
                   <a:srgbClr val="2563EB"/>
@@ -9605,6 +9995,7 @@
               </a:defRPr>
             </a:lvl4pPr>
             <a:lvl5pPr>
+              <a:buNone/>
               <a:defRPr sz="975" b="1">
                 <a:solidFill>
                   <a:srgbClr val="2563EB"/>
@@ -9612,6 +10003,7 @@
               </a:defRPr>
             </a:lvl5pPr>
             <a:lvl6pPr>
+              <a:buNone/>
               <a:defRPr sz="975" b="1">
                 <a:solidFill>
                   <a:srgbClr val="2563EB"/>
@@ -9619,6 +10011,7 @@
               </a:defRPr>
             </a:lvl6pPr>
             <a:lvl7pPr>
+              <a:buNone/>
               <a:defRPr sz="975" b="1">
                 <a:solidFill>
                   <a:srgbClr val="2563EB"/>
@@ -9626,6 +10019,7 @@
               </a:defRPr>
             </a:lvl7pPr>
             <a:lvl8pPr>
+              <a:buNone/>
               <a:defRPr sz="975" b="1">
                 <a:solidFill>
                   <a:srgbClr val="2563EB"/>
@@ -9633,6 +10027,7 @@
               </a:defRPr>
             </a:lvl8pPr>
             <a:lvl9pPr>
+              <a:buNone/>
               <a:defRPr sz="975" b="1">
                 <a:solidFill>
                   <a:srgbClr val="2563EB"/>
@@ -9642,6 +10037,7 @@
           </a:lstStyle>
           <a:p xmlns:a="http://schemas.openxmlformats.org/drawingml/2006/main">
             <a:pPr>
+              <a:buNone/>
               <a:defRPr sz="975" b="1">
                 <a:solidFill>
                   <a:srgbClr val="2563EB"/>
@@ -9698,6 +10094,7 @@
               </a:defRPr>
             </a:defPPr>
             <a:lvl1pPr>
+              <a:buNone/>
               <a:defRPr sz="2550" b="1">
                 <a:solidFill>
                   <a:srgbClr val="172B4D"/>
@@ -9705,6 +10102,7 @@
               </a:defRPr>
             </a:lvl1pPr>
             <a:lvl2pPr>
+              <a:buNone/>
               <a:defRPr sz="2550" b="1">
                 <a:solidFill>
                   <a:srgbClr val="172B4D"/>
@@ -9712,6 +10110,7 @@
               </a:defRPr>
             </a:lvl2pPr>
             <a:lvl3pPr>
+              <a:buNone/>
               <a:defRPr sz="2550" b="1">
                 <a:solidFill>
                   <a:srgbClr val="172B4D"/>
@@ -9719,6 +10118,7 @@
               </a:defRPr>
             </a:lvl3pPr>
             <a:lvl4pPr>
+              <a:buNone/>
               <a:defRPr sz="2550" b="1">
                 <a:solidFill>
                   <a:srgbClr val="172B4D"/>
@@ -9726,6 +10126,7 @@
               </a:defRPr>
             </a:lvl4pPr>
             <a:lvl5pPr>
+              <a:buNone/>
               <a:defRPr sz="2550" b="1">
                 <a:solidFill>
                   <a:srgbClr val="172B4D"/>
@@ -9733,6 +10134,7 @@
               </a:defRPr>
             </a:lvl5pPr>
             <a:lvl6pPr>
+              <a:buNone/>
               <a:defRPr sz="2550" b="1">
                 <a:solidFill>
                   <a:srgbClr val="172B4D"/>
@@ -9740,6 +10142,7 @@
               </a:defRPr>
             </a:lvl6pPr>
             <a:lvl7pPr>
+              <a:buNone/>
               <a:defRPr sz="2550" b="1">
                 <a:solidFill>
                   <a:srgbClr val="172B4D"/>
@@ -9747,6 +10150,7 @@
               </a:defRPr>
             </a:lvl7pPr>
             <a:lvl8pPr>
+              <a:buNone/>
               <a:defRPr sz="2550" b="1">
                 <a:solidFill>
                   <a:srgbClr val="172B4D"/>
@@ -9754,6 +10158,7 @@
               </a:defRPr>
             </a:lvl8pPr>
             <a:lvl9pPr>
+              <a:buNone/>
               <a:defRPr sz="2550" b="1">
                 <a:solidFill>
                   <a:srgbClr val="172B4D"/>
@@ -9763,6 +10168,7 @@
           </a:lstStyle>
           <a:p xmlns:a="http://schemas.openxmlformats.org/drawingml/2006/main">
             <a:pPr>
+              <a:buNone/>
               <a:defRPr sz="2550" b="1">
                 <a:solidFill>
                   <a:srgbClr val="172B4D"/>
@@ -9850,6 +10256,7 @@
               </a:defRPr>
             </a:defPPr>
             <a:lvl1pPr>
+              <a:buNone/>
               <a:defRPr sz="825" b="0">
                 <a:solidFill>
                   <a:srgbClr val="5E6F89"/>
@@ -9857,6 +10264,7 @@
               </a:defRPr>
             </a:lvl1pPr>
             <a:lvl2pPr>
+              <a:buNone/>
               <a:defRPr sz="825" b="0">
                 <a:solidFill>
                   <a:srgbClr val="5E6F89"/>
@@ -9864,6 +10272,7 @@
               </a:defRPr>
             </a:lvl2pPr>
             <a:lvl3pPr>
+              <a:buNone/>
               <a:defRPr sz="825" b="0">
                 <a:solidFill>
                   <a:srgbClr val="5E6F89"/>
@@ -9871,6 +10280,7 @@
               </a:defRPr>
             </a:lvl3pPr>
             <a:lvl4pPr>
+              <a:buNone/>
               <a:defRPr sz="825" b="0">
                 <a:solidFill>
                   <a:srgbClr val="5E6F89"/>
@@ -9878,6 +10288,7 @@
               </a:defRPr>
             </a:lvl4pPr>
             <a:lvl5pPr>
+              <a:buNone/>
               <a:defRPr sz="825" b="0">
                 <a:solidFill>
                   <a:srgbClr val="5E6F89"/>
@@ -9885,6 +10296,7 @@
               </a:defRPr>
             </a:lvl5pPr>
             <a:lvl6pPr>
+              <a:buNone/>
               <a:defRPr sz="825" b="0">
                 <a:solidFill>
                   <a:srgbClr val="5E6F89"/>
@@ -9892,6 +10304,7 @@
               </a:defRPr>
             </a:lvl6pPr>
             <a:lvl7pPr>
+              <a:buNone/>
               <a:defRPr sz="825" b="0">
                 <a:solidFill>
                   <a:srgbClr val="5E6F89"/>
@@ -9899,6 +10312,7 @@
               </a:defRPr>
             </a:lvl7pPr>
             <a:lvl8pPr>
+              <a:buNone/>
               <a:defRPr sz="825" b="0">
                 <a:solidFill>
                   <a:srgbClr val="5E6F89"/>
@@ -9906,6 +10320,7 @@
               </a:defRPr>
             </a:lvl8pPr>
             <a:lvl9pPr>
+              <a:buNone/>
               <a:defRPr sz="825" b="0">
                 <a:solidFill>
                   <a:srgbClr val="5E6F89"/>
@@ -9915,6 +10330,7 @@
           </a:lstStyle>
           <a:p xmlns:a="http://schemas.openxmlformats.org/drawingml/2006/main">
             <a:pPr>
+              <a:buNone/>
               <a:defRPr sz="825" b="0">
                 <a:solidFill>
                   <a:srgbClr val="5E6F89"/>
@@ -9937,7 +10353,7 @@
           <p:cNvPr id="6" name="">
             <a:extLst xmlns:a="http://schemas.openxmlformats.org/drawingml/2006/main">
               <a:ext uri="{FF2B5EF4-FFF2-40B4-BE49-F238E27FC236}">
-                <a16:creationId xmlns:a16="http://schemas.microsoft.com/office/drawing/2014/main" id="{FBD93619-67DC-4212-8C20-2B1913E8A1CB}"/>
+                <a16:creationId xmlns:a16="http://schemas.microsoft.com/office/drawing/2014/main" id="{1C948A37-57E6-4790-892A-FA5E45D396DF}"/>
               </a:ext>
             </a:extLst>
           </p:cNvPr>
@@ -9947,8 +10363,11 @@
           <p:nvPr/>
         </p:nvPicPr>
         <p:blipFill>
-          <a:blip xmlns:r="http://schemas.openxmlformats.org/officeDocument/2006/relationships" xmlns:a="http://schemas.openxmlformats.org/drawingml/2006/main" r:embed="R53c9bf9e209b48b3"/>
-          <a:stretch xmlns:a="http://schemas.openxmlformats.org/drawingml/2006/main"/>
+          <a:blip xmlns:r="http://schemas.openxmlformats.org/officeDocument/2006/relationships" xmlns:a="http://schemas.openxmlformats.org/drawingml/2006/main" r:embed="R4bf0919f66734d08"/>
+          <a:srcRect xmlns:a="http://schemas.openxmlformats.org/drawingml/2006/main" l="6133" t="0" r="6133" b="0"/>
+          <a:stretch xmlns:a="http://schemas.openxmlformats.org/drawingml/2006/main">
+            <a:fillRect l="0" t="0" r="0" b="0"/>
+          </a:stretch>
         </p:blipFill>
         <p:spPr>
           <a:xfrm xmlns:a="http://schemas.openxmlformats.org/drawingml/2006/main">
@@ -9956,9 +10375,7 @@
             <a:ext cx="6858000" cy="4286250"/>
           </a:xfrm>
           <a:prstGeom xmlns:a="http://schemas.openxmlformats.org/drawingml/2006/main" prst="roundRect">
-            <a:avLst>
-              <a:gd name="adj" fmla="val 2667"/>
-            </a:avLst>
+            <a:avLst/>
           </a:prstGeom>
         </p:spPr>
       </p:pic>
@@ -10001,6 +10418,7 @@
               </a:defRPr>
             </a:defPPr>
             <a:lvl1pPr>
+              <a:buNone/>
               <a:defRPr sz="1725" b="1">
                 <a:solidFill>
                   <a:srgbClr val="172B4D"/>
@@ -10008,6 +10426,7 @@
               </a:defRPr>
             </a:lvl1pPr>
             <a:lvl2pPr>
+              <a:buNone/>
               <a:defRPr sz="1725" b="1">
                 <a:solidFill>
                   <a:srgbClr val="172B4D"/>
@@ -10015,6 +10434,7 @@
               </a:defRPr>
             </a:lvl2pPr>
             <a:lvl3pPr>
+              <a:buNone/>
               <a:defRPr sz="1725" b="1">
                 <a:solidFill>
                   <a:srgbClr val="172B4D"/>
@@ -10022,6 +10442,7 @@
               </a:defRPr>
             </a:lvl3pPr>
             <a:lvl4pPr>
+              <a:buNone/>
               <a:defRPr sz="1725" b="1">
                 <a:solidFill>
                   <a:srgbClr val="172B4D"/>
@@ -10029,6 +10450,7 @@
               </a:defRPr>
             </a:lvl4pPr>
             <a:lvl5pPr>
+              <a:buNone/>
               <a:defRPr sz="1725" b="1">
                 <a:solidFill>
                   <a:srgbClr val="172B4D"/>
@@ -10036,6 +10458,7 @@
               </a:defRPr>
             </a:lvl5pPr>
             <a:lvl6pPr>
+              <a:buNone/>
               <a:defRPr sz="1725" b="1">
                 <a:solidFill>
                   <a:srgbClr val="172B4D"/>
@@ -10043,6 +10466,7 @@
               </a:defRPr>
             </a:lvl6pPr>
             <a:lvl7pPr>
+              <a:buNone/>
               <a:defRPr sz="1725" b="1">
                 <a:solidFill>
                   <a:srgbClr val="172B4D"/>
@@ -10050,6 +10474,7 @@
               </a:defRPr>
             </a:lvl7pPr>
             <a:lvl8pPr>
+              <a:buNone/>
               <a:defRPr sz="1725" b="1">
                 <a:solidFill>
                   <a:srgbClr val="172B4D"/>
@@ -10057,6 +10482,7 @@
               </a:defRPr>
             </a:lvl8pPr>
             <a:lvl9pPr>
+              <a:buNone/>
               <a:defRPr sz="1725" b="1">
                 <a:solidFill>
                   <a:srgbClr val="172B4D"/>
@@ -10066,6 +10492,7 @@
           </a:lstStyle>
           <a:p xmlns:a="http://schemas.openxmlformats.org/drawingml/2006/main">
             <a:pPr>
+              <a:buNone/>
               <a:defRPr sz="1725" b="1">
                 <a:solidFill>
                   <a:srgbClr val="172B4D"/>
@@ -10155,6 +10582,7 @@
               </a:defRPr>
             </a:defPPr>
             <a:lvl1pPr>
+              <a:buNone/>
               <a:defRPr sz="1350" b="0">
                 <a:solidFill>
                   <a:srgbClr val="172B4D"/>
@@ -10162,6 +10590,7 @@
               </a:defRPr>
             </a:lvl1pPr>
             <a:lvl2pPr>
+              <a:buNone/>
               <a:defRPr sz="1350" b="0">
                 <a:solidFill>
                   <a:srgbClr val="172B4D"/>
@@ -10169,6 +10598,7 @@
               </a:defRPr>
             </a:lvl2pPr>
             <a:lvl3pPr>
+              <a:buNone/>
               <a:defRPr sz="1350" b="0">
                 <a:solidFill>
                   <a:srgbClr val="172B4D"/>
@@ -10176,6 +10606,7 @@
               </a:defRPr>
             </a:lvl3pPr>
             <a:lvl4pPr>
+              <a:buNone/>
               <a:defRPr sz="1350" b="0">
                 <a:solidFill>
                   <a:srgbClr val="172B4D"/>
@@ -10183,6 +10614,7 @@
               </a:defRPr>
             </a:lvl4pPr>
             <a:lvl5pPr>
+              <a:buNone/>
               <a:defRPr sz="1350" b="0">
                 <a:solidFill>
                   <a:srgbClr val="172B4D"/>
@@ -10190,6 +10622,7 @@
               </a:defRPr>
             </a:lvl5pPr>
             <a:lvl6pPr>
+              <a:buNone/>
               <a:defRPr sz="1350" b="0">
                 <a:solidFill>
                   <a:srgbClr val="172B4D"/>
@@ -10197,6 +10630,7 @@
               </a:defRPr>
             </a:lvl6pPr>
             <a:lvl7pPr>
+              <a:buNone/>
               <a:defRPr sz="1350" b="0">
                 <a:solidFill>
                   <a:srgbClr val="172B4D"/>
@@ -10204,6 +10638,7 @@
               </a:defRPr>
             </a:lvl7pPr>
             <a:lvl8pPr>
+              <a:buNone/>
               <a:defRPr sz="1350" b="0">
                 <a:solidFill>
                   <a:srgbClr val="172B4D"/>
@@ -10211,6 +10646,7 @@
               </a:defRPr>
             </a:lvl8pPr>
             <a:lvl9pPr>
+              <a:buNone/>
               <a:defRPr sz="1350" b="0">
                 <a:solidFill>
                   <a:srgbClr val="172B4D"/>
@@ -10220,6 +10656,7 @@
           </a:lstStyle>
           <a:p xmlns:a="http://schemas.openxmlformats.org/drawingml/2006/main">
             <a:pPr>
+              <a:buNone/>
               <a:defRPr sz="1350" b="0">
                 <a:solidFill>
                   <a:srgbClr val="172B4D"/>
@@ -10309,6 +10746,7 @@
               </a:defRPr>
             </a:defPPr>
             <a:lvl1pPr>
+              <a:buNone/>
               <a:defRPr sz="1350" b="0">
                 <a:solidFill>
                   <a:srgbClr val="172B4D"/>
@@ -10316,6 +10754,7 @@
               </a:defRPr>
             </a:lvl1pPr>
             <a:lvl2pPr>
+              <a:buNone/>
               <a:defRPr sz="1350" b="0">
                 <a:solidFill>
                   <a:srgbClr val="172B4D"/>
@@ -10323,6 +10762,7 @@
               </a:defRPr>
             </a:lvl2pPr>
             <a:lvl3pPr>
+              <a:buNone/>
               <a:defRPr sz="1350" b="0">
                 <a:solidFill>
                   <a:srgbClr val="172B4D"/>
@@ -10330,6 +10770,7 @@
               </a:defRPr>
             </a:lvl3pPr>
             <a:lvl4pPr>
+              <a:buNone/>
               <a:defRPr sz="1350" b="0">
                 <a:solidFill>
                   <a:srgbClr val="172B4D"/>
@@ -10337,6 +10778,7 @@
               </a:defRPr>
             </a:lvl4pPr>
             <a:lvl5pPr>
+              <a:buNone/>
               <a:defRPr sz="1350" b="0">
                 <a:solidFill>
                   <a:srgbClr val="172B4D"/>
@@ -10344,6 +10786,7 @@
               </a:defRPr>
             </a:lvl5pPr>
             <a:lvl6pPr>
+              <a:buNone/>
               <a:defRPr sz="1350" b="0">
                 <a:solidFill>
                   <a:srgbClr val="172B4D"/>
@@ -10351,6 +10794,7 @@
               </a:defRPr>
             </a:lvl6pPr>
             <a:lvl7pPr>
+              <a:buNone/>
               <a:defRPr sz="1350" b="0">
                 <a:solidFill>
                   <a:srgbClr val="172B4D"/>
@@ -10358,6 +10802,7 @@
               </a:defRPr>
             </a:lvl7pPr>
             <a:lvl8pPr>
+              <a:buNone/>
               <a:defRPr sz="1350" b="0">
                 <a:solidFill>
                   <a:srgbClr val="172B4D"/>
@@ -10365,6 +10810,7 @@
               </a:defRPr>
             </a:lvl8pPr>
             <a:lvl9pPr>
+              <a:buNone/>
               <a:defRPr sz="1350" b="0">
                 <a:solidFill>
                   <a:srgbClr val="172B4D"/>
@@ -10374,6 +10820,7 @@
           </a:lstStyle>
           <a:p xmlns:a="http://schemas.openxmlformats.org/drawingml/2006/main">
             <a:pPr>
+              <a:buNone/>
               <a:defRPr sz="1350" b="0">
                 <a:solidFill>
                   <a:srgbClr val="172B4D"/>
@@ -10463,6 +10910,7 @@
               </a:defRPr>
             </a:defPPr>
             <a:lvl1pPr>
+              <a:buNone/>
               <a:defRPr sz="1350" b="0">
                 <a:solidFill>
                   <a:srgbClr val="172B4D"/>
@@ -10470,6 +10918,7 @@
               </a:defRPr>
             </a:lvl1pPr>
             <a:lvl2pPr>
+              <a:buNone/>
               <a:defRPr sz="1350" b="0">
                 <a:solidFill>
                   <a:srgbClr val="172B4D"/>
@@ -10477,6 +10926,7 @@
               </a:defRPr>
             </a:lvl2pPr>
             <a:lvl3pPr>
+              <a:buNone/>
               <a:defRPr sz="1350" b="0">
                 <a:solidFill>
                   <a:srgbClr val="172B4D"/>
@@ -10484,6 +10934,7 @@
               </a:defRPr>
             </a:lvl3pPr>
             <a:lvl4pPr>
+              <a:buNone/>
               <a:defRPr sz="1350" b="0">
                 <a:solidFill>
                   <a:srgbClr val="172B4D"/>
@@ -10491,6 +10942,7 @@
               </a:defRPr>
             </a:lvl4pPr>
             <a:lvl5pPr>
+              <a:buNone/>
               <a:defRPr sz="1350" b="0">
                 <a:solidFill>
                   <a:srgbClr val="172B4D"/>
@@ -10498,6 +10950,7 @@
               </a:defRPr>
             </a:lvl5pPr>
             <a:lvl6pPr>
+              <a:buNone/>
               <a:defRPr sz="1350" b="0">
                 <a:solidFill>
                   <a:srgbClr val="172B4D"/>
@@ -10505,6 +10958,7 @@
               </a:defRPr>
             </a:lvl6pPr>
             <a:lvl7pPr>
+              <a:buNone/>
               <a:defRPr sz="1350" b="0">
                 <a:solidFill>
                   <a:srgbClr val="172B4D"/>
@@ -10512,6 +10966,7 @@
               </a:defRPr>
             </a:lvl7pPr>
             <a:lvl8pPr>
+              <a:buNone/>
               <a:defRPr sz="1350" b="0">
                 <a:solidFill>
                   <a:srgbClr val="172B4D"/>
@@ -10519,6 +10974,7 @@
               </a:defRPr>
             </a:lvl8pPr>
             <a:lvl9pPr>
+              <a:buNone/>
               <a:defRPr sz="1350" b="0">
                 <a:solidFill>
                   <a:srgbClr val="172B4D"/>
@@ -10528,6 +10984,7 @@
           </a:lstStyle>
           <a:p xmlns:a="http://schemas.openxmlformats.org/drawingml/2006/main">
             <a:pPr>
+              <a:buNone/>
               <a:defRPr sz="1350" b="0">
                 <a:solidFill>
                   <a:srgbClr val="172B4D"/>
@@ -10617,6 +11074,7 @@
               </a:defRPr>
             </a:defPPr>
             <a:lvl1pPr>
+              <a:buNone/>
               <a:defRPr sz="1350" b="0">
                 <a:solidFill>
                   <a:srgbClr val="172B4D"/>
@@ -10624,6 +11082,7 @@
               </a:defRPr>
             </a:lvl1pPr>
             <a:lvl2pPr>
+              <a:buNone/>
               <a:defRPr sz="1350" b="0">
                 <a:solidFill>
                   <a:srgbClr val="172B4D"/>
@@ -10631,6 +11090,7 @@
               </a:defRPr>
             </a:lvl2pPr>
             <a:lvl3pPr>
+              <a:buNone/>
               <a:defRPr sz="1350" b="0">
                 <a:solidFill>
                   <a:srgbClr val="172B4D"/>
@@ -10638,6 +11098,7 @@
               </a:defRPr>
             </a:lvl3pPr>
             <a:lvl4pPr>
+              <a:buNone/>
               <a:defRPr sz="1350" b="0">
                 <a:solidFill>
                   <a:srgbClr val="172B4D"/>
@@ -10645,6 +11106,7 @@
               </a:defRPr>
             </a:lvl4pPr>
             <a:lvl5pPr>
+              <a:buNone/>
               <a:defRPr sz="1350" b="0">
                 <a:solidFill>
                   <a:srgbClr val="172B4D"/>
@@ -10652,6 +11114,7 @@
               </a:defRPr>
             </a:lvl5pPr>
             <a:lvl6pPr>
+              <a:buNone/>
               <a:defRPr sz="1350" b="0">
                 <a:solidFill>
                   <a:srgbClr val="172B4D"/>
@@ -10659,6 +11122,7 @@
               </a:defRPr>
             </a:lvl6pPr>
             <a:lvl7pPr>
+              <a:buNone/>
               <a:defRPr sz="1350" b="0">
                 <a:solidFill>
                   <a:srgbClr val="172B4D"/>
@@ -10666,6 +11130,7 @@
               </a:defRPr>
             </a:lvl7pPr>
             <a:lvl8pPr>
+              <a:buNone/>
               <a:defRPr sz="1350" b="0">
                 <a:solidFill>
                   <a:srgbClr val="172B4D"/>
@@ -10673,6 +11138,7 @@
               </a:defRPr>
             </a:lvl8pPr>
             <a:lvl9pPr>
+              <a:buNone/>
               <a:defRPr sz="1350" b="0">
                 <a:solidFill>
                   <a:srgbClr val="172B4D"/>
@@ -10682,6 +11148,7 @@
           </a:lstStyle>
           <a:p xmlns:a="http://schemas.openxmlformats.org/drawingml/2006/main">
             <a:pPr>
+              <a:buNone/>
               <a:defRPr sz="1350" b="0">
                 <a:solidFill>
                   <a:srgbClr val="172B4D"/>
@@ -10694,7 +11161,7 @@
                   <a:srgbClr val="172B4D"/>
                 </a:solidFill>
               </a:rPr>
-              <a:t>Suggestions are unverified until you test them against the page.</a:t>
+              <a:t>Snapshot alternatives remain suggestions until tested against the page.</a:t>
             </a:r>
           </a:p>
         </p:txBody>
@@ -10798,6 +11265,7 @@
               </a:defRPr>
             </a:defPPr>
             <a:lvl1pPr>
+              <a:buNone/>
               <a:defRPr sz="975" b="1">
                 <a:solidFill>
                   <a:srgbClr val="2563EB"/>
@@ -10805,6 +11273,7 @@
               </a:defRPr>
             </a:lvl1pPr>
             <a:lvl2pPr>
+              <a:buNone/>
               <a:defRPr sz="975" b="1">
                 <a:solidFill>
                   <a:srgbClr val="2563EB"/>
@@ -10812,6 +11281,7 @@
               </a:defRPr>
             </a:lvl2pPr>
             <a:lvl3pPr>
+              <a:buNone/>
               <a:defRPr sz="975" b="1">
                 <a:solidFill>
                   <a:srgbClr val="2563EB"/>
@@ -10819,6 +11289,7 @@
               </a:defRPr>
             </a:lvl3pPr>
             <a:lvl4pPr>
+              <a:buNone/>
               <a:defRPr sz="975" b="1">
                 <a:solidFill>
                   <a:srgbClr val="2563EB"/>
@@ -10826,6 +11297,7 @@
               </a:defRPr>
             </a:lvl4pPr>
             <a:lvl5pPr>
+              <a:buNone/>
               <a:defRPr sz="975" b="1">
                 <a:solidFill>
                   <a:srgbClr val="2563EB"/>
@@ -10833,6 +11305,7 @@
               </a:defRPr>
             </a:lvl5pPr>
             <a:lvl6pPr>
+              <a:buNone/>
               <a:defRPr sz="975" b="1">
                 <a:solidFill>
                   <a:srgbClr val="2563EB"/>
@@ -10840,6 +11313,7 @@
               </a:defRPr>
             </a:lvl6pPr>
             <a:lvl7pPr>
+              <a:buNone/>
               <a:defRPr sz="975" b="1">
                 <a:solidFill>
                   <a:srgbClr val="2563EB"/>
@@ -10847,6 +11321,7 @@
               </a:defRPr>
             </a:lvl7pPr>
             <a:lvl8pPr>
+              <a:buNone/>
               <a:defRPr sz="975" b="1">
                 <a:solidFill>
                   <a:srgbClr val="2563EB"/>
@@ -10854,6 +11329,7 @@
               </a:defRPr>
             </a:lvl8pPr>
             <a:lvl9pPr>
+              <a:buNone/>
               <a:defRPr sz="975" b="1">
                 <a:solidFill>
                   <a:srgbClr val="2563EB"/>
@@ -10863,6 +11339,7 @@
           </a:lstStyle>
           <a:p xmlns:a="http://schemas.openxmlformats.org/drawingml/2006/main">
             <a:pPr>
+              <a:buNone/>
               <a:defRPr sz="975" b="1">
                 <a:solidFill>
                   <a:srgbClr val="2563EB"/>
@@ -10919,6 +11396,7 @@
               </a:defRPr>
             </a:defPPr>
             <a:lvl1pPr>
+              <a:buNone/>
               <a:defRPr sz="2550" b="1">
                 <a:solidFill>
                   <a:srgbClr val="172B4D"/>
@@ -10926,6 +11404,7 @@
               </a:defRPr>
             </a:lvl1pPr>
             <a:lvl2pPr>
+              <a:buNone/>
               <a:defRPr sz="2550" b="1">
                 <a:solidFill>
                   <a:srgbClr val="172B4D"/>
@@ -10933,6 +11412,7 @@
               </a:defRPr>
             </a:lvl2pPr>
             <a:lvl3pPr>
+              <a:buNone/>
               <a:defRPr sz="2550" b="1">
                 <a:solidFill>
                   <a:srgbClr val="172B4D"/>
@@ -10940,6 +11420,7 @@
               </a:defRPr>
             </a:lvl3pPr>
             <a:lvl4pPr>
+              <a:buNone/>
               <a:defRPr sz="2550" b="1">
                 <a:solidFill>
                   <a:srgbClr val="172B4D"/>
@@ -10947,6 +11428,7 @@
               </a:defRPr>
             </a:lvl4pPr>
             <a:lvl5pPr>
+              <a:buNone/>
               <a:defRPr sz="2550" b="1">
                 <a:solidFill>
                   <a:srgbClr val="172B4D"/>
@@ -10954,6 +11436,7 @@
               </a:defRPr>
             </a:lvl5pPr>
             <a:lvl6pPr>
+              <a:buNone/>
               <a:defRPr sz="2550" b="1">
                 <a:solidFill>
                   <a:srgbClr val="172B4D"/>
@@ -10961,6 +11444,7 @@
               </a:defRPr>
             </a:lvl6pPr>
             <a:lvl7pPr>
+              <a:buNone/>
               <a:defRPr sz="2550" b="1">
                 <a:solidFill>
                   <a:srgbClr val="172B4D"/>
@@ -10968,6 +11452,7 @@
               </a:defRPr>
             </a:lvl7pPr>
             <a:lvl8pPr>
+              <a:buNone/>
               <a:defRPr sz="2550" b="1">
                 <a:solidFill>
                   <a:srgbClr val="172B4D"/>
@@ -10975,6 +11460,7 @@
               </a:defRPr>
             </a:lvl8pPr>
             <a:lvl9pPr>
+              <a:buNone/>
               <a:defRPr sz="2550" b="1">
                 <a:solidFill>
                   <a:srgbClr val="172B4D"/>
@@ -10984,6 +11470,7 @@
           </a:lstStyle>
           <a:p xmlns:a="http://schemas.openxmlformats.org/drawingml/2006/main">
             <a:pPr>
+              <a:buNone/>
               <a:defRPr sz="2550" b="1">
                 <a:solidFill>
                   <a:srgbClr val="172B4D"/>
@@ -11071,6 +11558,7 @@
               </a:defRPr>
             </a:defPPr>
             <a:lvl1pPr>
+              <a:buNone/>
               <a:defRPr sz="825" b="0">
                 <a:solidFill>
                   <a:srgbClr val="5E6F89"/>
@@ -11078,6 +11566,7 @@
               </a:defRPr>
             </a:lvl1pPr>
             <a:lvl2pPr>
+              <a:buNone/>
               <a:defRPr sz="825" b="0">
                 <a:solidFill>
                   <a:srgbClr val="5E6F89"/>
@@ -11085,6 +11574,7 @@
               </a:defRPr>
             </a:lvl2pPr>
             <a:lvl3pPr>
+              <a:buNone/>
               <a:defRPr sz="825" b="0">
                 <a:solidFill>
                   <a:srgbClr val="5E6F89"/>
@@ -11092,6 +11582,7 @@
               </a:defRPr>
             </a:lvl3pPr>
             <a:lvl4pPr>
+              <a:buNone/>
               <a:defRPr sz="825" b="0">
                 <a:solidFill>
                   <a:srgbClr val="5E6F89"/>
@@ -11099,6 +11590,7 @@
               </a:defRPr>
             </a:lvl4pPr>
             <a:lvl5pPr>
+              <a:buNone/>
               <a:defRPr sz="825" b="0">
                 <a:solidFill>
                   <a:srgbClr val="5E6F89"/>
@@ -11106,6 +11598,7 @@
               </a:defRPr>
             </a:lvl5pPr>
             <a:lvl6pPr>
+              <a:buNone/>
               <a:defRPr sz="825" b="0">
                 <a:solidFill>
                   <a:srgbClr val="5E6F89"/>
@@ -11113,6 +11606,7 @@
               </a:defRPr>
             </a:lvl6pPr>
             <a:lvl7pPr>
+              <a:buNone/>
               <a:defRPr sz="825" b="0">
                 <a:solidFill>
                   <a:srgbClr val="5E6F89"/>
@@ -11120,6 +11614,7 @@
               </a:defRPr>
             </a:lvl7pPr>
             <a:lvl8pPr>
+              <a:buNone/>
               <a:defRPr sz="825" b="0">
                 <a:solidFill>
                   <a:srgbClr val="5E6F89"/>
@@ -11127,6 +11622,7 @@
               </a:defRPr>
             </a:lvl8pPr>
             <a:lvl9pPr>
+              <a:buNone/>
               <a:defRPr sz="825" b="0">
                 <a:solidFill>
                   <a:srgbClr val="5E6F89"/>
@@ -11136,6 +11632,7 @@
           </a:lstStyle>
           <a:p xmlns:a="http://schemas.openxmlformats.org/drawingml/2006/main">
             <a:pPr>
+              <a:buNone/>
               <a:defRPr sz="825" b="0">
                 <a:solidFill>
                   <a:srgbClr val="5E6F89"/>
@@ -11158,7 +11655,7 @@
           <p:cNvPr id="6" name="">
             <a:extLst xmlns:a="http://schemas.openxmlformats.org/drawingml/2006/main">
               <a:ext uri="{FF2B5EF4-FFF2-40B4-BE49-F238E27FC236}">
-                <a16:creationId xmlns:a16="http://schemas.microsoft.com/office/drawing/2014/main" id="{71C00FD5-FC02-48F1-9446-DAD1F7D362F0}"/>
+                <a16:creationId xmlns:a16="http://schemas.microsoft.com/office/drawing/2014/main" id="{905FC22B-58A9-463A-8239-541C0A74EE99}"/>
               </a:ext>
             </a:extLst>
           </p:cNvPr>
@@ -11168,8 +11665,11 @@
           <p:nvPr/>
         </p:nvPicPr>
         <p:blipFill>
-          <a:blip xmlns:r="http://schemas.openxmlformats.org/officeDocument/2006/relationships" xmlns:a="http://schemas.openxmlformats.org/drawingml/2006/main" r:embed="R801085e8f5444c59"/>
-          <a:stretch xmlns:a="http://schemas.openxmlformats.org/drawingml/2006/main"/>
+          <a:blip xmlns:r="http://schemas.openxmlformats.org/officeDocument/2006/relationships" xmlns:a="http://schemas.openxmlformats.org/drawingml/2006/main" r:embed="R3d49b8a6c97f4b32"/>
+          <a:srcRect xmlns:a="http://schemas.openxmlformats.org/drawingml/2006/main" l="6133" t="0" r="6133" b="0"/>
+          <a:stretch xmlns:a="http://schemas.openxmlformats.org/drawingml/2006/main">
+            <a:fillRect l="0" t="0" r="0" b="0"/>
+          </a:stretch>
         </p:blipFill>
         <p:spPr>
           <a:xfrm xmlns:a="http://schemas.openxmlformats.org/drawingml/2006/main">
@@ -11177,9 +11677,7 @@
             <a:ext cx="6858000" cy="4286250"/>
           </a:xfrm>
           <a:prstGeom xmlns:a="http://schemas.openxmlformats.org/drawingml/2006/main" prst="roundRect">
-            <a:avLst>
-              <a:gd name="adj" fmla="val 2667"/>
-            </a:avLst>
+            <a:avLst/>
           </a:prstGeom>
         </p:spPr>
       </p:pic>
@@ -11222,6 +11720,7 @@
               </a:defRPr>
             </a:defPPr>
             <a:lvl1pPr>
+              <a:buNone/>
               <a:defRPr sz="1875" b="1">
                 <a:solidFill>
                   <a:srgbClr val="172B4D"/>
@@ -11229,6 +11728,7 @@
               </a:defRPr>
             </a:lvl1pPr>
             <a:lvl2pPr>
+              <a:buNone/>
               <a:defRPr sz="1875" b="1">
                 <a:solidFill>
                   <a:srgbClr val="172B4D"/>
@@ -11236,6 +11736,7 @@
               </a:defRPr>
             </a:lvl2pPr>
             <a:lvl3pPr>
+              <a:buNone/>
               <a:defRPr sz="1875" b="1">
                 <a:solidFill>
                   <a:srgbClr val="172B4D"/>
@@ -11243,6 +11744,7 @@
               </a:defRPr>
             </a:lvl3pPr>
             <a:lvl4pPr>
+              <a:buNone/>
               <a:defRPr sz="1875" b="1">
                 <a:solidFill>
                   <a:srgbClr val="172B4D"/>
@@ -11250,6 +11752,7 @@
               </a:defRPr>
             </a:lvl4pPr>
             <a:lvl5pPr>
+              <a:buNone/>
               <a:defRPr sz="1875" b="1">
                 <a:solidFill>
                   <a:srgbClr val="172B4D"/>
@@ -11257,6 +11760,7 @@
               </a:defRPr>
             </a:lvl5pPr>
             <a:lvl6pPr>
+              <a:buNone/>
               <a:defRPr sz="1875" b="1">
                 <a:solidFill>
                   <a:srgbClr val="172B4D"/>
@@ -11264,6 +11768,7 @@
               </a:defRPr>
             </a:lvl6pPr>
             <a:lvl7pPr>
+              <a:buNone/>
               <a:defRPr sz="1875" b="1">
                 <a:solidFill>
                   <a:srgbClr val="172B4D"/>
@@ -11271,6 +11776,7 @@
               </a:defRPr>
             </a:lvl7pPr>
             <a:lvl8pPr>
+              <a:buNone/>
               <a:defRPr sz="1875" b="1">
                 <a:solidFill>
                   <a:srgbClr val="172B4D"/>
@@ -11278,6 +11784,7 @@
               </a:defRPr>
             </a:lvl8pPr>
             <a:lvl9pPr>
+              <a:buNone/>
               <a:defRPr sz="1875" b="1">
                 <a:solidFill>
                   <a:srgbClr val="172B4D"/>
@@ -11287,6 +11794,7 @@
           </a:lstStyle>
           <a:p xmlns:a="http://schemas.openxmlformats.org/drawingml/2006/main">
             <a:pPr>
+              <a:buNone/>
               <a:defRPr sz="1875" b="1">
                 <a:solidFill>
                   <a:srgbClr val="172B4D"/>
@@ -11376,6 +11884,7 @@
               </a:defRPr>
             </a:defPPr>
             <a:lvl1pPr>
+              <a:buNone/>
               <a:defRPr sz="1350" b="0">
                 <a:solidFill>
                   <a:srgbClr val="172B4D"/>
@@ -11383,6 +11892,7 @@
               </a:defRPr>
             </a:lvl1pPr>
             <a:lvl2pPr>
+              <a:buNone/>
               <a:defRPr sz="1350" b="0">
                 <a:solidFill>
                   <a:srgbClr val="172B4D"/>
@@ -11390,6 +11900,7 @@
               </a:defRPr>
             </a:lvl2pPr>
             <a:lvl3pPr>
+              <a:buNone/>
               <a:defRPr sz="1350" b="0">
                 <a:solidFill>
                   <a:srgbClr val="172B4D"/>
@@ -11397,6 +11908,7 @@
               </a:defRPr>
             </a:lvl3pPr>
             <a:lvl4pPr>
+              <a:buNone/>
               <a:defRPr sz="1350" b="0">
                 <a:solidFill>
                   <a:srgbClr val="172B4D"/>
@@ -11404,6 +11916,7 @@
               </a:defRPr>
             </a:lvl4pPr>
             <a:lvl5pPr>
+              <a:buNone/>
               <a:defRPr sz="1350" b="0">
                 <a:solidFill>
                   <a:srgbClr val="172B4D"/>
@@ -11411,6 +11924,7 @@
               </a:defRPr>
             </a:lvl5pPr>
             <a:lvl6pPr>
+              <a:buNone/>
               <a:defRPr sz="1350" b="0">
                 <a:solidFill>
                   <a:srgbClr val="172B4D"/>
@@ -11418,6 +11932,7 @@
               </a:defRPr>
             </a:lvl6pPr>
             <a:lvl7pPr>
+              <a:buNone/>
               <a:defRPr sz="1350" b="0">
                 <a:solidFill>
                   <a:srgbClr val="172B4D"/>
@@ -11425,6 +11940,7 @@
               </a:defRPr>
             </a:lvl7pPr>
             <a:lvl8pPr>
+              <a:buNone/>
               <a:defRPr sz="1350" b="0">
                 <a:solidFill>
                   <a:srgbClr val="172B4D"/>
@@ -11432,6 +11948,7 @@
               </a:defRPr>
             </a:lvl8pPr>
             <a:lvl9pPr>
+              <a:buNone/>
               <a:defRPr sz="1350" b="0">
                 <a:solidFill>
                   <a:srgbClr val="172B4D"/>
@@ -11441,6 +11958,7 @@
           </a:lstStyle>
           <a:p xmlns:a="http://schemas.openxmlformats.org/drawingml/2006/main">
             <a:pPr>
+              <a:buNone/>
               <a:defRPr sz="1350" b="0">
                 <a:solidFill>
                   <a:srgbClr val="172B4D"/>
@@ -11453,7 +11971,7 @@
                   <a:srgbClr val="172B4D"/>
                 </a:solidFill>
               </a:rPr>
-              <a:t>Install Python 3.10+ and PySide6.</a:t>
+              <a:t>Download the standalone Windows EXE; no Python setup is needed.</a:t>
             </a:r>
           </a:p>
         </p:txBody>
@@ -11530,6 +12048,7 @@
               </a:defRPr>
             </a:defPPr>
             <a:lvl1pPr>
+              <a:buNone/>
               <a:defRPr sz="1350" b="0">
                 <a:solidFill>
                   <a:srgbClr val="172B4D"/>
@@ -11537,6 +12056,7 @@
               </a:defRPr>
             </a:lvl1pPr>
             <a:lvl2pPr>
+              <a:buNone/>
               <a:defRPr sz="1350" b="0">
                 <a:solidFill>
                   <a:srgbClr val="172B4D"/>
@@ -11544,6 +12064,7 @@
               </a:defRPr>
             </a:lvl2pPr>
             <a:lvl3pPr>
+              <a:buNone/>
               <a:defRPr sz="1350" b="0">
                 <a:solidFill>
                   <a:srgbClr val="172B4D"/>
@@ -11551,6 +12072,7 @@
               </a:defRPr>
             </a:lvl3pPr>
             <a:lvl4pPr>
+              <a:buNone/>
               <a:defRPr sz="1350" b="0">
                 <a:solidFill>
                   <a:srgbClr val="172B4D"/>
@@ -11558,6 +12080,7 @@
               </a:defRPr>
             </a:lvl4pPr>
             <a:lvl5pPr>
+              <a:buNone/>
               <a:defRPr sz="1350" b="0">
                 <a:solidFill>
                   <a:srgbClr val="172B4D"/>
@@ -11565,6 +12088,7 @@
               </a:defRPr>
             </a:lvl5pPr>
             <a:lvl6pPr>
+              <a:buNone/>
               <a:defRPr sz="1350" b="0">
                 <a:solidFill>
                   <a:srgbClr val="172B4D"/>
@@ -11572,6 +12096,7 @@
               </a:defRPr>
             </a:lvl6pPr>
             <a:lvl7pPr>
+              <a:buNone/>
               <a:defRPr sz="1350" b="0">
                 <a:solidFill>
                   <a:srgbClr val="172B4D"/>
@@ -11579,6 +12104,7 @@
               </a:defRPr>
             </a:lvl7pPr>
             <a:lvl8pPr>
+              <a:buNone/>
               <a:defRPr sz="1350" b="0">
                 <a:solidFill>
                   <a:srgbClr val="172B4D"/>
@@ -11586,6 +12112,7 @@
               </a:defRPr>
             </a:lvl8pPr>
             <a:lvl9pPr>
+              <a:buNone/>
               <a:defRPr sz="1350" b="0">
                 <a:solidFill>
                   <a:srgbClr val="172B4D"/>
@@ -11595,6 +12122,7 @@
           </a:lstStyle>
           <a:p xmlns:a="http://schemas.openxmlformats.org/drawingml/2006/main">
             <a:pPr>
+              <a:buNone/>
               <a:defRPr sz="1350" b="0">
                 <a:solidFill>
                   <a:srgbClr val="172B4D"/>
@@ -11607,7 +12135,7 @@
                   <a:srgbClr val="172B4D"/>
                 </a:solidFill>
               </a:rPr>
-              <a:t>Launch locator_generator_pyside6.py or use the Windows batch launcher.</a:t>
+              <a:t>Or install Python 3.10+ and PySide6 to run the source version.</a:t>
             </a:r>
           </a:p>
         </p:txBody>
@@ -11684,6 +12212,7 @@
               </a:defRPr>
             </a:defPPr>
             <a:lvl1pPr>
+              <a:buNone/>
               <a:defRPr sz="1350" b="0">
                 <a:solidFill>
                   <a:srgbClr val="172B4D"/>
@@ -11691,6 +12220,7 @@
               </a:defRPr>
             </a:lvl1pPr>
             <a:lvl2pPr>
+              <a:buNone/>
               <a:defRPr sz="1350" b="0">
                 <a:solidFill>
                   <a:srgbClr val="172B4D"/>
@@ -11698,6 +12228,7 @@
               </a:defRPr>
             </a:lvl2pPr>
             <a:lvl3pPr>
+              <a:buNone/>
               <a:defRPr sz="1350" b="0">
                 <a:solidFill>
                   <a:srgbClr val="172B4D"/>
@@ -11705,6 +12236,7 @@
               </a:defRPr>
             </a:lvl3pPr>
             <a:lvl4pPr>
+              <a:buNone/>
               <a:defRPr sz="1350" b="0">
                 <a:solidFill>
                   <a:srgbClr val="172B4D"/>
@@ -11712,6 +12244,7 @@
               </a:defRPr>
             </a:lvl4pPr>
             <a:lvl5pPr>
+              <a:buNone/>
               <a:defRPr sz="1350" b="0">
                 <a:solidFill>
                   <a:srgbClr val="172B4D"/>
@@ -11719,6 +12252,7 @@
               </a:defRPr>
             </a:lvl5pPr>
             <a:lvl6pPr>
+              <a:buNone/>
               <a:defRPr sz="1350" b="0">
                 <a:solidFill>
                   <a:srgbClr val="172B4D"/>
@@ -11726,6 +12260,7 @@
               </a:defRPr>
             </a:lvl6pPr>
             <a:lvl7pPr>
+              <a:buNone/>
               <a:defRPr sz="1350" b="0">
                 <a:solidFill>
                   <a:srgbClr val="172B4D"/>
@@ -11733,6 +12268,7 @@
               </a:defRPr>
             </a:lvl7pPr>
             <a:lvl8pPr>
+              <a:buNone/>
               <a:defRPr sz="1350" b="0">
                 <a:solidFill>
                   <a:srgbClr val="172B4D"/>
@@ -11740,6 +12276,7 @@
               </a:defRPr>
             </a:lvl8pPr>
             <a:lvl9pPr>
+              <a:buNone/>
               <a:defRPr sz="1350" b="0">
                 <a:solidFill>
                   <a:srgbClr val="172B4D"/>
@@ -11749,6 +12286,7 @@
           </a:lstStyle>
           <a:p xmlns:a="http://schemas.openxmlformats.org/drawingml/2006/main">
             <a:pPr>
+              <a:buNone/>
               <a:defRPr sz="1350" b="0">
                 <a:solidFill>
                   <a:srgbClr val="172B4D"/>
@@ -11761,7 +12299,7 @@
                   <a:srgbClr val="172B4D"/>
                 </a:solidFill>
               </a:rPr>
-              <a:t>Install Selenium for live-page workflows.</a:t>
+              <a:t>Use Chrome or Edge for Selenium-based live workflows.</a:t>
             </a:r>
           </a:p>
         </p:txBody>
@@ -11838,6 +12376,7 @@
               </a:defRPr>
             </a:defPPr>
             <a:lvl1pPr>
+              <a:buNone/>
               <a:defRPr sz="1350" b="0">
                 <a:solidFill>
                   <a:srgbClr val="172B4D"/>
@@ -11845,6 +12384,7 @@
               </a:defRPr>
             </a:lvl1pPr>
             <a:lvl2pPr>
+              <a:buNone/>
               <a:defRPr sz="1350" b="0">
                 <a:solidFill>
                   <a:srgbClr val="172B4D"/>
@@ -11852,6 +12392,7 @@
               </a:defRPr>
             </a:lvl2pPr>
             <a:lvl3pPr>
+              <a:buNone/>
               <a:defRPr sz="1350" b="0">
                 <a:solidFill>
                   <a:srgbClr val="172B4D"/>
@@ -11859,6 +12400,7 @@
               </a:defRPr>
             </a:lvl3pPr>
             <a:lvl4pPr>
+              <a:buNone/>
               <a:defRPr sz="1350" b="0">
                 <a:solidFill>
                   <a:srgbClr val="172B4D"/>
@@ -11866,6 +12408,7 @@
               </a:defRPr>
             </a:lvl4pPr>
             <a:lvl5pPr>
+              <a:buNone/>
               <a:defRPr sz="1350" b="0">
                 <a:solidFill>
                   <a:srgbClr val="172B4D"/>
@@ -11873,6 +12416,7 @@
               </a:defRPr>
             </a:lvl5pPr>
             <a:lvl6pPr>
+              <a:buNone/>
               <a:defRPr sz="1350" b="0">
                 <a:solidFill>
                   <a:srgbClr val="172B4D"/>
@@ -11880,6 +12424,7 @@
               </a:defRPr>
             </a:lvl6pPr>
             <a:lvl7pPr>
+              <a:buNone/>
               <a:defRPr sz="1350" b="0">
                 <a:solidFill>
                   <a:srgbClr val="172B4D"/>
@@ -11887,6 +12432,7 @@
               </a:defRPr>
             </a:lvl7pPr>
             <a:lvl8pPr>
+              <a:buNone/>
               <a:defRPr sz="1350" b="0">
                 <a:solidFill>
                   <a:srgbClr val="172B4D"/>
@@ -11894,6 +12440,7 @@
               </a:defRPr>
             </a:lvl8pPr>
             <a:lvl9pPr>
+              <a:buNone/>
               <a:defRPr sz="1350" b="0">
                 <a:solidFill>
                   <a:srgbClr val="172B4D"/>
@@ -11903,6 +12450,7 @@
           </a:lstStyle>
           <a:p xmlns:a="http://schemas.openxmlformats.org/drawingml/2006/main">
             <a:pPr>
+              <a:buNone/>
               <a:defRPr sz="1350" b="0">
                 <a:solidFill>
                   <a:srgbClr val="172B4D"/>
@@ -11992,6 +12540,7 @@
               </a:defRPr>
             </a:defPPr>
             <a:lvl1pPr>
+              <a:buNone/>
               <a:defRPr sz="1125" b="1">
                 <a:solidFill>
                   <a:srgbClr val="0B8F87"/>
@@ -11999,6 +12548,7 @@
               </a:defRPr>
             </a:lvl1pPr>
             <a:lvl2pPr>
+              <a:buNone/>
               <a:defRPr sz="1125" b="1">
                 <a:solidFill>
                   <a:srgbClr val="0B8F87"/>
@@ -12006,6 +12556,7 @@
               </a:defRPr>
             </a:lvl2pPr>
             <a:lvl3pPr>
+              <a:buNone/>
               <a:defRPr sz="1125" b="1">
                 <a:solidFill>
                   <a:srgbClr val="0B8F87"/>
@@ -12013,6 +12564,7 @@
               </a:defRPr>
             </a:lvl3pPr>
             <a:lvl4pPr>
+              <a:buNone/>
               <a:defRPr sz="1125" b="1">
                 <a:solidFill>
                   <a:srgbClr val="0B8F87"/>
@@ -12020,6 +12572,7 @@
               </a:defRPr>
             </a:lvl4pPr>
             <a:lvl5pPr>
+              <a:buNone/>
               <a:defRPr sz="1125" b="1">
                 <a:solidFill>
                   <a:srgbClr val="0B8F87"/>
@@ -12027,6 +12580,7 @@
               </a:defRPr>
             </a:lvl5pPr>
             <a:lvl6pPr>
+              <a:buNone/>
               <a:defRPr sz="1125" b="1">
                 <a:solidFill>
                   <a:srgbClr val="0B8F87"/>
@@ -12034,6 +12588,7 @@
               </a:defRPr>
             </a:lvl6pPr>
             <a:lvl7pPr>
+              <a:buNone/>
               <a:defRPr sz="1125" b="1">
                 <a:solidFill>
                   <a:srgbClr val="0B8F87"/>
@@ -12041,6 +12596,7 @@
               </a:defRPr>
             </a:lvl7pPr>
             <a:lvl8pPr>
+              <a:buNone/>
               <a:defRPr sz="1125" b="1">
                 <a:solidFill>
                   <a:srgbClr val="0B8F87"/>
@@ -12048,6 +12604,7 @@
               </a:defRPr>
             </a:lvl8pPr>
             <a:lvl9pPr>
+              <a:buNone/>
               <a:defRPr sz="1125" b="1">
                 <a:solidFill>
                   <a:srgbClr val="0B8F87"/>
@@ -12057,6 +12614,7 @@
           </a:lstStyle>
           <a:p xmlns:a="http://schemas.openxmlformats.org/drawingml/2006/main">
             <a:pPr>
+              <a:buNone/>
               <a:defRPr sz="1125" b="1">
                 <a:solidFill>
                   <a:srgbClr val="0B8F87"/>
@@ -12069,7 +12627,7 @@
                   <a:srgbClr val="0B8F87"/>
                 </a:solidFill>
               </a:rPr>
-              <a:t>Scores are guidance, not a guarantee of stability.</a:t>
+              <a:t>Scores and stability labels are guidance, not guarantees.</a:t>
             </a:r>
           </a:p>
         </p:txBody>
